--- a/out/analysis/dnssec_program_rfc_cases.pptx
+++ b/out/analysis/dnssec_program_rfc_cases.pptx
@@ -3433,7 +3433,7 @@
         </p:nvGraphicFramePr>
         <p:xfrm>
           <a:off x="731520" y="4343400"/>
-          <a:ext cx="10332720" cy="1097280"/>
+          <a:ext cx="11247120" cy="1645920"/>
         </p:xfrm>
         <a:graphic>
           <a:graphicData uri="http://schemas.openxmlformats.org/drawingml/2006/table">
@@ -3442,13 +3442,13 @@
                 <a:tableStyleId>{5C22544A-7EE6-4342-B048-85BDC9FD1C3A}</a:tableStyleId>
               </a:tblPr>
               <a:tblGrid>
-                <a:gridCol w="2103120"/>
+                <a:gridCol w="3017520"/>
                 <a:gridCol w="822960"/>
                 <a:gridCol w="822960"/>
-                <a:gridCol w="1828800"/>
-                <a:gridCol w="1463040"/>
-                <a:gridCol w="1828800"/>
-                <a:gridCol w="1463040"/>
+                <a:gridCol w="1554480"/>
+                <a:gridCol w="1737360"/>
+                <a:gridCol w="1554480"/>
+                <a:gridCol w="1737360"/>
               </a:tblGrid>
               <a:tr h="274320">
                 <a:tc>
@@ -3606,7 +3606,7 @@
                     <a:lstStyle/>
                     <a:p>
                       <a:r>
-                        <a:rPr sz="900" b="0">
+                        <a:rPr sz="850" b="0">
                           <a:solidFill>
                             <a:srgbClr val="0B0B0B"/>
                           </a:solidFill>
@@ -3627,7 +3627,7 @@
                     <a:lstStyle/>
                     <a:p>
                       <a:r>
-                        <a:rPr sz="900" b="0">
+                        <a:rPr sz="850" b="0">
                           <a:solidFill>
                             <a:srgbClr val="0B0B0B"/>
                           </a:solidFill>
@@ -3648,7 +3648,7 @@
                     <a:lstStyle/>
                     <a:p>
                       <a:r>
-                        <a:rPr sz="900" b="0">
+                        <a:rPr sz="850" b="0">
                           <a:solidFill>
                             <a:srgbClr val="0B0B0B"/>
                           </a:solidFill>
@@ -3669,7 +3669,7 @@
                     <a:lstStyle/>
                     <a:p>
                       <a:r>
-                        <a:rPr sz="900" b="0">
+                        <a:rPr sz="850" b="0">
                           <a:solidFill>
                             <a:srgbClr val="0B0B0B"/>
                           </a:solidFill>
@@ -3690,7 +3690,7 @@
                     <a:lstStyle/>
                     <a:p>
                       <a:r>
-                        <a:rPr sz="900" b="0">
+                        <a:rPr sz="850" b="0">
                           <a:solidFill>
                             <a:srgbClr val="0B0B0B"/>
                           </a:solidFill>
@@ -3711,7 +3711,7 @@
                     <a:lstStyle/>
                     <a:p>
                       <a:r>
-                        <a:rPr sz="900" b="0">
+                        <a:rPr sz="850" b="0">
                           <a:solidFill>
                             <a:srgbClr val="0B0B0B"/>
                           </a:solidFill>
@@ -3732,7 +3732,7 @@
                     <a:lstStyle/>
                     <a:p>
                       <a:r>
-                        <a:rPr sz="900" b="0">
+                        <a:rPr sz="850" b="0">
                           <a:solidFill>
                             <a:srgbClr val="0B0B0B"/>
                           </a:solidFill>
@@ -3755,7 +3755,7 @@
                     <a:lstStyle/>
                     <a:p>
                       <a:r>
-                        <a:rPr sz="900" b="0">
+                        <a:rPr sz="850" b="0">
                           <a:solidFill>
                             <a:srgbClr val="0B0B0B"/>
                           </a:solidFill>
@@ -3776,7 +3776,7 @@
                     <a:lstStyle/>
                     <a:p>
                       <a:r>
-                        <a:rPr sz="900" b="0">
+                        <a:rPr sz="850" b="0">
                           <a:solidFill>
                             <a:srgbClr val="0B0B0B"/>
                           </a:solidFill>
@@ -3797,7 +3797,7 @@
                     <a:lstStyle/>
                     <a:p>
                       <a:r>
-                        <a:rPr sz="900" b="0">
+                        <a:rPr sz="850" b="0">
                           <a:solidFill>
                             <a:srgbClr val="0B0B0B"/>
                           </a:solidFill>
@@ -3818,7 +3818,7 @@
                     <a:lstStyle/>
                     <a:p>
                       <a:r>
-                        <a:rPr sz="900" b="0">
+                        <a:rPr sz="850" b="0">
                           <a:solidFill>
                             <a:srgbClr val="0B0B0B"/>
                           </a:solidFill>
@@ -3839,7 +3839,7 @@
                     <a:lstStyle/>
                     <a:p>
                       <a:r>
-                        <a:rPr sz="900" b="0">
+                        <a:rPr sz="850" b="0">
                           <a:solidFill>
                             <a:srgbClr val="0B0B0B"/>
                           </a:solidFill>
@@ -3860,7 +3860,7 @@
                     <a:lstStyle/>
                     <a:p>
                       <a:r>
-                        <a:rPr sz="900" b="0">
+                        <a:rPr sz="850" b="0">
                           <a:solidFill>
                             <a:srgbClr val="0B0B0B"/>
                           </a:solidFill>
@@ -3881,7 +3881,7 @@
                     <a:lstStyle/>
                     <a:p>
                       <a:r>
-                        <a:rPr sz="900" b="0">
+                        <a:rPr sz="850" b="0">
                           <a:solidFill>
                             <a:srgbClr val="0B0B0B"/>
                           </a:solidFill>
@@ -3904,7 +3904,7 @@
                     <a:lstStyle/>
                     <a:p>
                       <a:r>
-                        <a:rPr sz="900" b="0">
+                        <a:rPr sz="850" b="0">
                           <a:solidFill>
                             <a:srgbClr val="0B0B0B"/>
                           </a:solidFill>
@@ -3925,7 +3925,7 @@
                     <a:lstStyle/>
                     <a:p>
                       <a:r>
-                        <a:rPr sz="900" b="0">
+                        <a:rPr sz="850" b="0">
                           <a:solidFill>
                             <a:srgbClr val="0B0B0B"/>
                           </a:solidFill>
@@ -3946,7 +3946,7 @@
                     <a:lstStyle/>
                     <a:p>
                       <a:r>
-                        <a:rPr sz="900" b="0">
+                        <a:rPr sz="850" b="0">
                           <a:solidFill>
                             <a:srgbClr val="0B0B0B"/>
                           </a:solidFill>
@@ -3967,7 +3967,7 @@
                     <a:lstStyle/>
                     <a:p>
                       <a:r>
-                        <a:rPr sz="900" b="0">
+                        <a:rPr sz="850" b="0">
                           <a:solidFill>
                             <a:srgbClr val="0B0B0B"/>
                           </a:solidFill>
@@ -3988,7 +3988,7 @@
                     <a:lstStyle/>
                     <a:p>
                       <a:r>
-                        <a:rPr sz="900" b="0">
+                        <a:rPr sz="850" b="0">
                           <a:solidFill>
                             <a:srgbClr val="0B0B0B"/>
                           </a:solidFill>
@@ -4009,7 +4009,7 @@
                     <a:lstStyle/>
                     <a:p>
                       <a:r>
-                        <a:rPr sz="900" b="0">
+                        <a:rPr sz="850" b="0">
                           <a:solidFill>
                             <a:srgbClr val="0B0B0B"/>
                           </a:solidFill>
@@ -4030,12 +4030,310 @@
                     <a:lstStyle/>
                     <a:p>
                       <a:r>
-                        <a:rPr sz="900" b="0">
+                        <a:rPr sz="850" b="0">
                           <a:solidFill>
                             <a:srgbClr val="0B0B0B"/>
                           </a:solidFill>
                         </a:rPr>
                         <a:t>0.9%</a:t>
+                      </a:r>
+                    </a:p>
+                  </a:txBody>
+                  <a:tcPr marL="45720" marR="45720" marT="27432" marB="27432">
+                    <a:solidFill>
+                      <a:srgbClr val="FCFCFB"/>
+                    </a:solidFill>
+                  </a:tcPr>
+                </a:tc>
+              </a:tr>
+              <a:tr h="274320">
+                <a:tc>
+                  <a:txBody>
+                    <a:bodyPr/>
+                    <a:lstStyle/>
+                    <a:p>
+                      <a:r>
+                        <a:rPr sz="850" b="0">
+                          <a:solidFill>
+                            <a:srgbClr val="0B0B0B"/>
+                          </a:solidFill>
+                        </a:rPr>
+                        <a:t>Ubuntu 16.04: Knot DNS 2.0.0</a:t>
+                      </a:r>
+                    </a:p>
+                  </a:txBody>
+                  <a:tcPr marL="45720" marR="45720" marT="27432" marB="27432">
+                    <a:solidFill>
+                      <a:srgbClr val="FCFCFB"/>
+                    </a:solidFill>
+                  </a:tcPr>
+                </a:tc>
+                <a:tc>
+                  <a:txBody>
+                    <a:bodyPr/>
+                    <a:lstStyle/>
+                    <a:p>
+                      <a:r>
+                        <a:rPr sz="850" b="0">
+                          <a:solidFill>
+                            <a:srgbClr val="0B0B0B"/>
+                          </a:solidFill>
+                        </a:rPr>
+                        <a:t>OS package</a:t>
+                      </a:r>
+                    </a:p>
+                  </a:txBody>
+                  <a:tcPr marL="45720" marR="45720" marT="27432" marB="27432">
+                    <a:solidFill>
+                      <a:srgbClr val="FCFCFB"/>
+                    </a:solidFill>
+                  </a:tcPr>
+                </a:tc>
+                <a:tc>
+                  <a:txBody>
+                    <a:bodyPr/>
+                    <a:lstStyle/>
+                    <a:p>
+                      <a:r>
+                        <a:rPr sz="850" b="0">
+                          <a:solidFill>
+                            <a:srgbClr val="0B0B0B"/>
+                          </a:solidFill>
+                        </a:rPr>
+                        <a:t>2016-04</a:t>
+                      </a:r>
+                    </a:p>
+                  </a:txBody>
+                  <a:tcPr marL="45720" marR="45720" marT="27432" marB="27432">
+                    <a:solidFill>
+                      <a:srgbClr val="FCFCFB"/>
+                    </a:solidFill>
+                  </a:tcPr>
+                </a:tc>
+                <a:tc>
+                  <a:txBody>
+                    <a:bodyPr/>
+                    <a:lstStyle/>
+                    <a:p>
+                      <a:r>
+                        <a:rPr sz="850" b="0">
+                          <a:solidFill>
+                            <a:srgbClr val="0B0B0B"/>
+                          </a:solidFill>
+                        </a:rPr>
+                        <a:t>924</a:t>
+                      </a:r>
+                    </a:p>
+                  </a:txBody>
+                  <a:tcPr marL="45720" marR="45720" marT="27432" marB="27432">
+                    <a:solidFill>
+                      <a:srgbClr val="FCFCFB"/>
+                    </a:solidFill>
+                  </a:tcPr>
+                </a:tc>
+                <a:tc>
+                  <a:txBody>
+                    <a:bodyPr/>
+                    <a:lstStyle/>
+                    <a:p>
+                      <a:r>
+                        <a:rPr sz="850" b="0">
+                          <a:solidFill>
+                            <a:srgbClr val="0B0B0B"/>
+                          </a:solidFill>
+                        </a:rPr>
+                        <a:t>70.3% (96 blocks)</a:t>
+                      </a:r>
+                    </a:p>
+                  </a:txBody>
+                  <a:tcPr marL="45720" marR="45720" marT="27432" marB="27432">
+                    <a:solidFill>
+                      <a:srgbClr val="FCFCFB"/>
+                    </a:solidFill>
+                  </a:tcPr>
+                </a:tc>
+                <a:tc>
+                  <a:txBody>
+                    <a:bodyPr/>
+                    <a:lstStyle/>
+                    <a:p>
+                      <a:r>
+                        <a:rPr sz="850" b="0">
+                          <a:solidFill>
+                            <a:srgbClr val="0B0B0B"/>
+                          </a:solidFill>
+                        </a:rPr>
+                        <a:t>1237</a:t>
+                      </a:r>
+                    </a:p>
+                  </a:txBody>
+                  <a:tcPr marL="45720" marR="45720" marT="27432" marB="27432">
+                    <a:solidFill>
+                      <a:srgbClr val="FCFCFB"/>
+                    </a:solidFill>
+                  </a:tcPr>
+                </a:tc>
+                <a:tc>
+                  <a:txBody>
+                    <a:bodyPr/>
+                    <a:lstStyle/>
+                    <a:p>
+                      <a:r>
+                        <a:rPr sz="850" b="0">
+                          <a:solidFill>
+                            <a:srgbClr val="0B0B0B"/>
+                          </a:solidFill>
+                        </a:rPr>
+                        <a:t>96.8% (94 blocks)</a:t>
+                      </a:r>
+                    </a:p>
+                  </a:txBody>
+                  <a:tcPr marL="45720" marR="45720" marT="27432" marB="27432">
+                    <a:solidFill>
+                      <a:srgbClr val="FCFCFB"/>
+                    </a:solidFill>
+                  </a:tcPr>
+                </a:tc>
+              </a:tr>
+              <a:tr h="274320">
+                <a:tc>
+                  <a:txBody>
+                    <a:bodyPr/>
+                    <a:lstStyle/>
+                    <a:p>
+                      <a:r>
+                        <a:rPr sz="850" b="0">
+                          <a:solidFill>
+                            <a:srgbClr val="0B0B0B"/>
+                          </a:solidFill>
+                        </a:rPr>
+                        <a:t>Debian 9: Knot DNS 2.0.0</a:t>
+                      </a:r>
+                    </a:p>
+                  </a:txBody>
+                  <a:tcPr marL="45720" marR="45720" marT="27432" marB="27432">
+                    <a:solidFill>
+                      <a:srgbClr val="FCFCFB"/>
+                    </a:solidFill>
+                  </a:tcPr>
+                </a:tc>
+                <a:tc>
+                  <a:txBody>
+                    <a:bodyPr/>
+                    <a:lstStyle/>
+                    <a:p>
+                      <a:r>
+                        <a:rPr sz="850" b="0">
+                          <a:solidFill>
+                            <a:srgbClr val="0B0B0B"/>
+                          </a:solidFill>
+                        </a:rPr>
+                        <a:t>OS package</a:t>
+                      </a:r>
+                    </a:p>
+                  </a:txBody>
+                  <a:tcPr marL="45720" marR="45720" marT="27432" marB="27432">
+                    <a:solidFill>
+                      <a:srgbClr val="FCFCFB"/>
+                    </a:solidFill>
+                  </a:tcPr>
+                </a:tc>
+                <a:tc>
+                  <a:txBody>
+                    <a:bodyPr/>
+                    <a:lstStyle/>
+                    <a:p>
+                      <a:r>
+                        <a:rPr sz="850" b="0">
+                          <a:solidFill>
+                            <a:srgbClr val="0B0B0B"/>
+                          </a:solidFill>
+                        </a:rPr>
+                        <a:t>2017-06</a:t>
+                      </a:r>
+                    </a:p>
+                  </a:txBody>
+                  <a:tcPr marL="45720" marR="45720" marT="27432" marB="27432">
+                    <a:solidFill>
+                      <a:srgbClr val="FCFCFB"/>
+                    </a:solidFill>
+                  </a:tcPr>
+                </a:tc>
+                <a:tc>
+                  <a:txBody>
+                    <a:bodyPr/>
+                    <a:lstStyle/>
+                    <a:p>
+                      <a:r>
+                        <a:rPr sz="850" b="0">
+                          <a:solidFill>
+                            <a:srgbClr val="0B0B0B"/>
+                          </a:solidFill>
+                        </a:rPr>
+                        <a:t>1247</a:t>
+                      </a:r>
+                    </a:p>
+                  </a:txBody>
+                  <a:tcPr marL="45720" marR="45720" marT="27432" marB="27432">
+                    <a:solidFill>
+                      <a:srgbClr val="FCFCFB"/>
+                    </a:solidFill>
+                  </a:tcPr>
+                </a:tc>
+                <a:tc>
+                  <a:txBody>
+                    <a:bodyPr/>
+                    <a:lstStyle/>
+                    <a:p>
+                      <a:r>
+                        <a:rPr sz="850" b="0">
+                          <a:solidFill>
+                            <a:srgbClr val="0B0B0B"/>
+                          </a:solidFill>
+                        </a:rPr>
+                        <a:t>97.6% (96 blocks)</a:t>
+                      </a:r>
+                    </a:p>
+                  </a:txBody>
+                  <a:tcPr marL="45720" marR="45720" marT="27432" marB="27432">
+                    <a:solidFill>
+                      <a:srgbClr val="FCFCFB"/>
+                    </a:solidFill>
+                  </a:tcPr>
+                </a:tc>
+                <a:tc>
+                  <a:txBody>
+                    <a:bodyPr/>
+                    <a:lstStyle/>
+                    <a:p>
+                      <a:r>
+                        <a:rPr sz="850" b="0">
+                          <a:solidFill>
+                            <a:srgbClr val="0B0B0B"/>
+                          </a:solidFill>
+                        </a:rPr>
+                        <a:t>597</a:t>
+                      </a:r>
+                    </a:p>
+                  </a:txBody>
+                  <a:tcPr marL="45720" marR="45720" marT="27432" marB="27432">
+                    <a:solidFill>
+                      <a:srgbClr val="FCFCFB"/>
+                    </a:solidFill>
+                  </a:tcPr>
+                </a:tc>
+                <a:tc>
+                  <a:txBody>
+                    <a:bodyPr/>
+                    <a:lstStyle/>
+                    <a:p>
+                      <a:r>
+                        <a:rPr sz="850" b="0">
+                          <a:solidFill>
+                            <a:srgbClr val="0B0B0B"/>
+                          </a:solidFill>
+                        </a:rPr>
+                        <a:t>18.4% (43 blocks)</a:t>
                       </a:r>
                     </a:p>
                   </a:txBody>
@@ -5851,7 +6149,7 @@
         </p:nvGraphicFramePr>
         <p:xfrm>
           <a:off x="731520" y="4343400"/>
-          <a:ext cx="10332720" cy="1371600"/>
+          <a:ext cx="11247120" cy="1371600"/>
         </p:xfrm>
         <a:graphic>
           <a:graphicData uri="http://schemas.openxmlformats.org/drawingml/2006/table">
@@ -5860,13 +6158,13 @@
                 <a:tableStyleId>{5C22544A-7EE6-4342-B048-85BDC9FD1C3A}</a:tableStyleId>
               </a:tblPr>
               <a:tblGrid>
-                <a:gridCol w="2103120"/>
+                <a:gridCol w="3017520"/>
                 <a:gridCol w="822960"/>
                 <a:gridCol w="822960"/>
-                <a:gridCol w="1828800"/>
-                <a:gridCol w="1463040"/>
-                <a:gridCol w="1828800"/>
-                <a:gridCol w="1463040"/>
+                <a:gridCol w="1554480"/>
+                <a:gridCol w="1737360"/>
+                <a:gridCol w="1554480"/>
+                <a:gridCol w="1737360"/>
               </a:tblGrid>
               <a:tr h="274320">
                 <a:tc>
@@ -6024,7 +6322,7 @@
                     <a:lstStyle/>
                     <a:p>
                       <a:r>
-                        <a:rPr sz="900" b="0">
+                        <a:rPr sz="850" b="0">
                           <a:solidFill>
                             <a:srgbClr val="0B0B0B"/>
                           </a:solidFill>
@@ -6045,7 +6343,7 @@
                     <a:lstStyle/>
                     <a:p>
                       <a:r>
-                        <a:rPr sz="900" b="0">
+                        <a:rPr sz="850" b="0">
                           <a:solidFill>
                             <a:srgbClr val="0B0B0B"/>
                           </a:solidFill>
@@ -6066,7 +6364,7 @@
                     <a:lstStyle/>
                     <a:p>
                       <a:r>
-                        <a:rPr sz="900" b="0">
+                        <a:rPr sz="850" b="0">
                           <a:solidFill>
                             <a:srgbClr val="0B0B0B"/>
                           </a:solidFill>
@@ -6087,7 +6385,7 @@
                     <a:lstStyle/>
                     <a:p>
                       <a:r>
-                        <a:rPr sz="900" b="0">
+                        <a:rPr sz="850" b="0">
                           <a:solidFill>
                             <a:srgbClr val="0B0B0B"/>
                           </a:solidFill>
@@ -6108,7 +6406,7 @@
                     <a:lstStyle/>
                     <a:p>
                       <a:r>
-                        <a:rPr sz="900" b="0">
+                        <a:rPr sz="850" b="0">
                           <a:solidFill>
                             <a:srgbClr val="0B0B0B"/>
                           </a:solidFill>
@@ -6129,7 +6427,7 @@
                     <a:lstStyle/>
                     <a:p>
                       <a:r>
-                        <a:rPr sz="900" b="0">
+                        <a:rPr sz="850" b="0">
                           <a:solidFill>
                             <a:srgbClr val="0B0B0B"/>
                           </a:solidFill>
@@ -6150,7 +6448,7 @@
                     <a:lstStyle/>
                     <a:p>
                       <a:r>
-                        <a:rPr sz="900" b="0">
+                        <a:rPr sz="850" b="0">
                           <a:solidFill>
                             <a:srgbClr val="0B0B0B"/>
                           </a:solidFill>
@@ -6173,7 +6471,7 @@
                     <a:lstStyle/>
                     <a:p>
                       <a:r>
-                        <a:rPr sz="900" b="0">
+                        <a:rPr sz="850" b="0">
                           <a:solidFill>
                             <a:srgbClr val="0B0B0B"/>
                           </a:solidFill>
@@ -6194,7 +6492,7 @@
                     <a:lstStyle/>
                     <a:p>
                       <a:r>
-                        <a:rPr sz="900" b="0">
+                        <a:rPr sz="850" b="0">
                           <a:solidFill>
                             <a:srgbClr val="0B0B0B"/>
                           </a:solidFill>
@@ -6215,7 +6513,7 @@
                     <a:lstStyle/>
                     <a:p>
                       <a:r>
-                        <a:rPr sz="900" b="0">
+                        <a:rPr sz="850" b="0">
                           <a:solidFill>
                             <a:srgbClr val="0B0B0B"/>
                           </a:solidFill>
@@ -6236,7 +6534,7 @@
                     <a:lstStyle/>
                     <a:p>
                       <a:r>
-                        <a:rPr sz="900" b="0">
+                        <a:rPr sz="850" b="0">
                           <a:solidFill>
                             <a:srgbClr val="0B0B0B"/>
                           </a:solidFill>
@@ -6257,7 +6555,7 @@
                     <a:lstStyle/>
                     <a:p>
                       <a:r>
-                        <a:rPr sz="900" b="0">
+                        <a:rPr sz="850" b="0">
                           <a:solidFill>
                             <a:srgbClr val="0B0B0B"/>
                           </a:solidFill>
@@ -6278,7 +6576,7 @@
                     <a:lstStyle/>
                     <a:p>
                       <a:r>
-                        <a:rPr sz="900" b="0">
+                        <a:rPr sz="850" b="0">
                           <a:solidFill>
                             <a:srgbClr val="0B0B0B"/>
                           </a:solidFill>
@@ -6299,7 +6597,7 @@
                     <a:lstStyle/>
                     <a:p>
                       <a:r>
-                        <a:rPr sz="900" b="0">
+                        <a:rPr sz="850" b="0">
                           <a:solidFill>
                             <a:srgbClr val="0B0B0B"/>
                           </a:solidFill>
@@ -6322,7 +6620,7 @@
                     <a:lstStyle/>
                     <a:p>
                       <a:r>
-                        <a:rPr sz="900" b="0">
+                        <a:rPr sz="850" b="0">
                           <a:solidFill>
                             <a:srgbClr val="0B0B0B"/>
                           </a:solidFill>
@@ -6343,7 +6641,7 @@
                     <a:lstStyle/>
                     <a:p>
                       <a:r>
-                        <a:rPr sz="900" b="0">
+                        <a:rPr sz="850" b="0">
                           <a:solidFill>
                             <a:srgbClr val="0B0B0B"/>
                           </a:solidFill>
@@ -6364,7 +6662,7 @@
                     <a:lstStyle/>
                     <a:p>
                       <a:r>
-                        <a:rPr sz="900" b="0">
+                        <a:rPr sz="850" b="0">
                           <a:solidFill>
                             <a:srgbClr val="0B0B0B"/>
                           </a:solidFill>
@@ -6385,7 +6683,7 @@
                     <a:lstStyle/>
                     <a:p>
                       <a:r>
-                        <a:rPr sz="900" b="0">
+                        <a:rPr sz="850" b="0">
                           <a:solidFill>
                             <a:srgbClr val="0B0B0B"/>
                           </a:solidFill>
@@ -6406,7 +6704,7 @@
                     <a:lstStyle/>
                     <a:p>
                       <a:r>
-                        <a:rPr sz="900" b="0">
+                        <a:rPr sz="850" b="0">
                           <a:solidFill>
                             <a:srgbClr val="0B0B0B"/>
                           </a:solidFill>
@@ -6427,7 +6725,7 @@
                     <a:lstStyle/>
                     <a:p>
                       <a:r>
-                        <a:rPr sz="900" b="0">
+                        <a:rPr sz="850" b="0">
                           <a:solidFill>
                             <a:srgbClr val="0B0B0B"/>
                           </a:solidFill>
@@ -6448,7 +6746,7 @@
                     <a:lstStyle/>
                     <a:p>
                       <a:r>
-                        <a:rPr sz="900" b="0">
+                        <a:rPr sz="850" b="0">
                           <a:solidFill>
                             <a:srgbClr val="0B0B0B"/>
                           </a:solidFill>
@@ -6471,7 +6769,7 @@
                     <a:lstStyle/>
                     <a:p>
                       <a:r>
-                        <a:rPr sz="900" b="0">
+                        <a:rPr sz="850" b="0">
                           <a:solidFill>
                             <a:srgbClr val="0B0B0B"/>
                           </a:solidFill>
@@ -6492,7 +6790,7 @@
                     <a:lstStyle/>
                     <a:p>
                       <a:r>
-                        <a:rPr sz="900" b="0">
+                        <a:rPr sz="850" b="0">
                           <a:solidFill>
                             <a:srgbClr val="0B0B0B"/>
                           </a:solidFill>
@@ -6513,7 +6811,7 @@
                     <a:lstStyle/>
                     <a:p>
                       <a:r>
-                        <a:rPr sz="900" b="0">
+                        <a:rPr sz="850" b="0">
                           <a:solidFill>
                             <a:srgbClr val="0B0B0B"/>
                           </a:solidFill>
@@ -6534,7 +6832,7 @@
                     <a:lstStyle/>
                     <a:p>
                       <a:r>
-                        <a:rPr sz="900" b="0">
+                        <a:rPr sz="850" b="0">
                           <a:solidFill>
                             <a:srgbClr val="0B0B0B"/>
                           </a:solidFill>
@@ -6555,7 +6853,7 @@
                     <a:lstStyle/>
                     <a:p>
                       <a:r>
-                        <a:rPr sz="900" b="0">
+                        <a:rPr sz="850" b="0">
                           <a:solidFill>
                             <a:srgbClr val="0B0B0B"/>
                           </a:solidFill>
@@ -6576,7 +6874,7 @@
                     <a:lstStyle/>
                     <a:p>
                       <a:r>
-                        <a:rPr sz="900" b="0">
+                        <a:rPr sz="850" b="0">
                           <a:solidFill>
                             <a:srgbClr val="0B0B0B"/>
                           </a:solidFill>
@@ -6597,7 +6895,7 @@
                     <a:lstStyle/>
                     <a:p>
                       <a:r>
-                        <a:rPr sz="900" b="0">
+                        <a:rPr sz="850" b="0">
                           <a:solidFill>
                             <a:srgbClr val="0B0B0B"/>
                           </a:solidFill>
@@ -8944,7 +9242,7 @@
         </p:nvGraphicFramePr>
         <p:xfrm>
           <a:off x="731520" y="4343400"/>
-          <a:ext cx="10332720" cy="822960"/>
+          <a:ext cx="11247120" cy="1371600"/>
         </p:xfrm>
         <a:graphic>
           <a:graphicData uri="http://schemas.openxmlformats.org/drawingml/2006/table">
@@ -8953,13 +9251,13 @@
                 <a:tableStyleId>{5C22544A-7EE6-4342-B048-85BDC9FD1C3A}</a:tableStyleId>
               </a:tblPr>
               <a:tblGrid>
-                <a:gridCol w="2103120"/>
+                <a:gridCol w="3017520"/>
                 <a:gridCol w="822960"/>
                 <a:gridCol w="822960"/>
-                <a:gridCol w="1828800"/>
-                <a:gridCol w="1463040"/>
-                <a:gridCol w="1828800"/>
-                <a:gridCol w="1463040"/>
+                <a:gridCol w="1554480"/>
+                <a:gridCol w="1737360"/>
+                <a:gridCol w="1554480"/>
+                <a:gridCol w="1737360"/>
               </a:tblGrid>
               <a:tr h="274320">
                 <a:tc>
@@ -9117,7 +9415,7 @@
                     <a:lstStyle/>
                     <a:p>
                       <a:r>
-                        <a:rPr sz="900" b="0">
+                        <a:rPr sz="850" b="0">
                           <a:solidFill>
                             <a:srgbClr val="0B0B0B"/>
                           </a:solidFill>
@@ -9138,7 +9436,7 @@
                     <a:lstStyle/>
                     <a:p>
                       <a:r>
-                        <a:rPr sz="900" b="0">
+                        <a:rPr sz="850" b="0">
                           <a:solidFill>
                             <a:srgbClr val="0B0B0B"/>
                           </a:solidFill>
@@ -9159,7 +9457,7 @@
                     <a:lstStyle/>
                     <a:p>
                       <a:r>
-                        <a:rPr sz="900" b="0">
+                        <a:rPr sz="850" b="0">
                           <a:solidFill>
                             <a:srgbClr val="0B0B0B"/>
                           </a:solidFill>
@@ -9180,7 +9478,7 @@
                     <a:lstStyle/>
                     <a:p>
                       <a:r>
-                        <a:rPr sz="900" b="0">
+                        <a:rPr sz="850" b="0">
                           <a:solidFill>
                             <a:srgbClr val="0B0B0B"/>
                           </a:solidFill>
@@ -9201,7 +9499,7 @@
                     <a:lstStyle/>
                     <a:p>
                       <a:r>
-                        <a:rPr sz="900" b="0">
+                        <a:rPr sz="850" b="0">
                           <a:solidFill>
                             <a:srgbClr val="0B0B0B"/>
                           </a:solidFill>
@@ -9222,7 +9520,7 @@
                     <a:lstStyle/>
                     <a:p>
                       <a:r>
-                        <a:rPr sz="900" b="0">
+                        <a:rPr sz="850" b="0">
                           <a:solidFill>
                             <a:srgbClr val="0B0B0B"/>
                           </a:solidFill>
@@ -9243,7 +9541,7 @@
                     <a:lstStyle/>
                     <a:p>
                       <a:r>
-                        <a:rPr sz="900" b="0">
+                        <a:rPr sz="850" b="0">
                           <a:solidFill>
                             <a:srgbClr val="0B0B0B"/>
                           </a:solidFill>
@@ -9266,7 +9564,7 @@
                     <a:lstStyle/>
                     <a:p>
                       <a:r>
-                        <a:rPr sz="900" b="0">
+                        <a:rPr sz="850" b="0">
                           <a:solidFill>
                             <a:srgbClr val="0B0B0B"/>
                           </a:solidFill>
@@ -9287,7 +9585,7 @@
                     <a:lstStyle/>
                     <a:p>
                       <a:r>
-                        <a:rPr sz="900" b="0">
+                        <a:rPr sz="850" b="0">
                           <a:solidFill>
                             <a:srgbClr val="0B0B0B"/>
                           </a:solidFill>
@@ -9308,7 +9606,7 @@
                     <a:lstStyle/>
                     <a:p>
                       <a:r>
-                        <a:rPr sz="900" b="0">
+                        <a:rPr sz="850" b="0">
                           <a:solidFill>
                             <a:srgbClr val="0B0B0B"/>
                           </a:solidFill>
@@ -9329,7 +9627,7 @@
                     <a:lstStyle/>
                     <a:p>
                       <a:r>
-                        <a:rPr sz="900" b="0">
+                        <a:rPr sz="850" b="0">
                           <a:solidFill>
                             <a:srgbClr val="0B0B0B"/>
                           </a:solidFill>
@@ -9350,7 +9648,7 @@
                     <a:lstStyle/>
                     <a:p>
                       <a:r>
-                        <a:rPr sz="900" b="0">
+                        <a:rPr sz="850" b="0">
                           <a:solidFill>
                             <a:srgbClr val="0B0B0B"/>
                           </a:solidFill>
@@ -9371,7 +9669,7 @@
                     <a:lstStyle/>
                     <a:p>
                       <a:r>
-                        <a:rPr sz="900" b="0">
+                        <a:rPr sz="850" b="0">
                           <a:solidFill>
                             <a:srgbClr val="0B0B0B"/>
                           </a:solidFill>
@@ -9392,12 +9690,310 @@
                     <a:lstStyle/>
                     <a:p>
                       <a:r>
-                        <a:rPr sz="900" b="0">
+                        <a:rPr sz="850" b="0">
                           <a:solidFill>
                             <a:srgbClr val="0B0B0B"/>
                           </a:solidFill>
                         </a:rPr>
                         <a:t>50.0%</a:t>
+                      </a:r>
+                    </a:p>
+                  </a:txBody>
+                  <a:tcPr marL="45720" marR="45720" marT="27432" marB="27432">
+                    <a:solidFill>
+                      <a:srgbClr val="FCFCFB"/>
+                    </a:solidFill>
+                  </a:tcPr>
+                </a:tc>
+              </a:tr>
+              <a:tr h="274320">
+                <a:tc>
+                  <a:txBody>
+                    <a:bodyPr/>
+                    <a:lstStyle/>
+                    <a:p>
+                      <a:r>
+                        <a:rPr sz="850" b="0">
+                          <a:solidFill>
+                            <a:srgbClr val="0B0B0B"/>
+                          </a:solidFill>
+                        </a:rPr>
+                        <a:t>Ubuntu 16.04: BIND 9 9.7.0</a:t>
+                      </a:r>
+                    </a:p>
+                  </a:txBody>
+                  <a:tcPr marL="45720" marR="45720" marT="27432" marB="27432">
+                    <a:solidFill>
+                      <a:srgbClr val="FCFCFB"/>
+                    </a:solidFill>
+                  </a:tcPr>
+                </a:tc>
+                <a:tc>
+                  <a:txBody>
+                    <a:bodyPr/>
+                    <a:lstStyle/>
+                    <a:p>
+                      <a:r>
+                        <a:rPr sz="850" b="0">
+                          <a:solidFill>
+                            <a:srgbClr val="0B0B0B"/>
+                          </a:solidFill>
+                        </a:rPr>
+                        <a:t>OS package</a:t>
+                      </a:r>
+                    </a:p>
+                  </a:txBody>
+                  <a:tcPr marL="45720" marR="45720" marT="27432" marB="27432">
+                    <a:solidFill>
+                      <a:srgbClr val="FCFCFB"/>
+                    </a:solidFill>
+                  </a:tcPr>
+                </a:tc>
+                <a:tc>
+                  <a:txBody>
+                    <a:bodyPr/>
+                    <a:lstStyle/>
+                    <a:p>
+                      <a:r>
+                        <a:rPr sz="850" b="0">
+                          <a:solidFill>
+                            <a:srgbClr val="0B0B0B"/>
+                          </a:solidFill>
+                        </a:rPr>
+                        <a:t>2016-04</a:t>
+                      </a:r>
+                    </a:p>
+                  </a:txBody>
+                  <a:tcPr marL="45720" marR="45720" marT="27432" marB="27432">
+                    <a:solidFill>
+                      <a:srgbClr val="FCFCFB"/>
+                    </a:solidFill>
+                  </a:tcPr>
+                </a:tc>
+                <a:tc>
+                  <a:txBody>
+                    <a:bodyPr/>
+                    <a:lstStyle/>
+                    <a:p>
+                      <a:r>
+                        <a:rPr sz="850" b="0">
+                          <a:solidFill>
+                            <a:srgbClr val="0B0B0B"/>
+                          </a:solidFill>
+                        </a:rPr>
+                        <a:t>924</a:t>
+                      </a:r>
+                    </a:p>
+                  </a:txBody>
+                  <a:tcPr marL="45720" marR="45720" marT="27432" marB="27432">
+                    <a:solidFill>
+                      <a:srgbClr val="FCFCFB"/>
+                    </a:solidFill>
+                  </a:tcPr>
+                </a:tc>
+                <a:tc>
+                  <a:txBody>
+                    <a:bodyPr/>
+                    <a:lstStyle/>
+                    <a:p>
+                      <a:r>
+                        <a:rPr sz="850" b="0">
+                          <a:solidFill>
+                            <a:srgbClr val="0B0B0B"/>
+                          </a:solidFill>
+                        </a:rPr>
+                        <a:t>5.8% (14 blocks)</a:t>
+                      </a:r>
+                    </a:p>
+                  </a:txBody>
+                  <a:tcPr marL="45720" marR="45720" marT="27432" marB="27432">
+                    <a:solidFill>
+                      <a:srgbClr val="FCFCFB"/>
+                    </a:solidFill>
+                  </a:tcPr>
+                </a:tc>
+                <a:tc>
+                  <a:txBody>
+                    <a:bodyPr/>
+                    <a:lstStyle/>
+                    <a:p>
+                      <a:r>
+                        <a:rPr sz="850" b="0">
+                          <a:solidFill>
+                            <a:srgbClr val="0B0B0B"/>
+                          </a:solidFill>
+                        </a:rPr>
+                        <a:t>1237</a:t>
+                      </a:r>
+                    </a:p>
+                  </a:txBody>
+                  <a:tcPr marL="45720" marR="45720" marT="27432" marB="27432">
+                    <a:solidFill>
+                      <a:srgbClr val="FCFCFB"/>
+                    </a:solidFill>
+                  </a:tcPr>
+                </a:tc>
+                <a:tc>
+                  <a:txBody>
+                    <a:bodyPr/>
+                    <a:lstStyle/>
+                    <a:p>
+                      <a:r>
+                        <a:rPr sz="850" b="0">
+                          <a:solidFill>
+                            <a:srgbClr val="0B0B0B"/>
+                          </a:solidFill>
+                        </a:rPr>
+                        <a:t>0.8% (6 blocks)</a:t>
+                      </a:r>
+                    </a:p>
+                  </a:txBody>
+                  <a:tcPr marL="45720" marR="45720" marT="27432" marB="27432">
+                    <a:solidFill>
+                      <a:srgbClr val="FCFCFB"/>
+                    </a:solidFill>
+                  </a:tcPr>
+                </a:tc>
+              </a:tr>
+              <a:tr h="274320">
+                <a:tc>
+                  <a:txBody>
+                    <a:bodyPr/>
+                    <a:lstStyle/>
+                    <a:p>
+                      <a:r>
+                        <a:rPr sz="850" b="0">
+                          <a:solidFill>
+                            <a:srgbClr val="0B0B0B"/>
+                          </a:solidFill>
+                        </a:rPr>
+                        <a:t>Debian 9: BIND 9 9.7.0</a:t>
+                      </a:r>
+                    </a:p>
+                  </a:txBody>
+                  <a:tcPr marL="45720" marR="45720" marT="27432" marB="27432">
+                    <a:solidFill>
+                      <a:srgbClr val="FCFCFB"/>
+                    </a:solidFill>
+                  </a:tcPr>
+                </a:tc>
+                <a:tc>
+                  <a:txBody>
+                    <a:bodyPr/>
+                    <a:lstStyle/>
+                    <a:p>
+                      <a:r>
+                        <a:rPr sz="850" b="0">
+                          <a:solidFill>
+                            <a:srgbClr val="0B0B0B"/>
+                          </a:solidFill>
+                        </a:rPr>
+                        <a:t>OS package</a:t>
+                      </a:r>
+                    </a:p>
+                  </a:txBody>
+                  <a:tcPr marL="45720" marR="45720" marT="27432" marB="27432">
+                    <a:solidFill>
+                      <a:srgbClr val="FCFCFB"/>
+                    </a:solidFill>
+                  </a:tcPr>
+                </a:tc>
+                <a:tc>
+                  <a:txBody>
+                    <a:bodyPr/>
+                    <a:lstStyle/>
+                    <a:p>
+                      <a:r>
+                        <a:rPr sz="850" b="0">
+                          <a:solidFill>
+                            <a:srgbClr val="0B0B0B"/>
+                          </a:solidFill>
+                        </a:rPr>
+                        <a:t>2017-06</a:t>
+                      </a:r>
+                    </a:p>
+                  </a:txBody>
+                  <a:tcPr marL="45720" marR="45720" marT="27432" marB="27432">
+                    <a:solidFill>
+                      <a:srgbClr val="FCFCFB"/>
+                    </a:solidFill>
+                  </a:tcPr>
+                </a:tc>
+                <a:tc>
+                  <a:txBody>
+                    <a:bodyPr/>
+                    <a:lstStyle/>
+                    <a:p>
+                      <a:r>
+                        <a:rPr sz="850" b="0">
+                          <a:solidFill>
+                            <a:srgbClr val="0B0B0B"/>
+                          </a:solidFill>
+                        </a:rPr>
+                        <a:t>1247</a:t>
+                      </a:r>
+                    </a:p>
+                  </a:txBody>
+                  <a:tcPr marL="45720" marR="45720" marT="27432" marB="27432">
+                    <a:solidFill>
+                      <a:srgbClr val="FCFCFB"/>
+                    </a:solidFill>
+                  </a:tcPr>
+                </a:tc>
+                <a:tc>
+                  <a:txBody>
+                    <a:bodyPr/>
+                    <a:lstStyle/>
+                    <a:p>
+                      <a:r>
+                        <a:rPr sz="850" b="0">
+                          <a:solidFill>
+                            <a:srgbClr val="0B0B0B"/>
+                          </a:solidFill>
+                        </a:rPr>
+                        <a:t>0.3% (3 blocks)</a:t>
+                      </a:r>
+                    </a:p>
+                  </a:txBody>
+                  <a:tcPr marL="45720" marR="45720" marT="27432" marB="27432">
+                    <a:solidFill>
+                      <a:srgbClr val="FCFCFB"/>
+                    </a:solidFill>
+                  </a:tcPr>
+                </a:tc>
+                <a:tc>
+                  <a:txBody>
+                    <a:bodyPr/>
+                    <a:lstStyle/>
+                    <a:p>
+                      <a:r>
+                        <a:rPr sz="850" b="0">
+                          <a:solidFill>
+                            <a:srgbClr val="0B0B0B"/>
+                          </a:solidFill>
+                        </a:rPr>
+                        <a:t>597</a:t>
+                      </a:r>
+                    </a:p>
+                  </a:txBody>
+                  <a:tcPr marL="45720" marR="45720" marT="27432" marB="27432">
+                    <a:solidFill>
+                      <a:srgbClr val="FCFCFB"/>
+                    </a:solidFill>
+                  </a:tcPr>
+                </a:tc>
+                <a:tc>
+                  <a:txBody>
+                    <a:bodyPr/>
+                    <a:lstStyle/>
+                    <a:p>
+                      <a:r>
+                        <a:rPr sz="850" b="0">
+                          <a:solidFill>
+                            <a:srgbClr val="0B0B0B"/>
+                          </a:solidFill>
+                        </a:rPr>
+                        <a:t>21.1% (20 blocks)</a:t>
                       </a:r>
                     </a:p>
                   </a:txBody>
@@ -12736,7 +13332,7 @@
                 </a:solidFill>
                 <a:latin typeface="Segoe UI"/>
               </a:rPr>
-              <a:t>ECDSA: the Knot 2.1.0 and PowerDNS 4.0.0 defaults (2016) changed nothing in reverse DNS (0.2% -&gt; 0.3%, 0.3% -&gt; 0.2%). The share moved from 2017 and stepped around BIND 9.16.0 (22.8% -&gt; 38.8%), whose dnssec-policy is opt-in -- the operator still had to choose it, but the OS packages (Ubuntu 20.04, Debian 11) made ECDSA the one-line choice.</a:t>
+              <a:t>ECDSA: the Knot 2.1.0 and PowerDNS 4.0.0 defaults changed nothing on their upstream dates (0.2% -&gt; 0.3%, 0.3% -&gt; 0.2%), nor did Ubuntu 16.04 (Knot only). The step is Debian 9 (2017-06-17), the first OS release shipping both ECDSA-default signers: 0.2% -&gt; 57.1% of new signings, 3 -&gt; 55 blocks. A second step came with BIND 9.16.0 (22.8% -&gt; 38.8%) via Ubuntu 20.04 and Debian 11. The update path works -- one OS release at a time, on new zones only, and it never shows as a spike in the adoption curve.</a:t>
             </a:r>
           </a:p>
           <a:p>
@@ -12959,7 +13555,7 @@
                 </a:solidFill>
                 <a:latin typeface="Segoe UI"/>
               </a:rPr>
-              <a:t>OS packages: Ubuntu LTS 16.04 to 24.04 and Debian 11 to 13, from Launchpad and the Debian tracker; Debian 9 and 10 are no longer served and are not asserted. Package dates bound when a default became reachable by apt, not when any operator upgraded.</a:t>
+              <a:t>OS packages: Ubuntu LTS 16.04 to 24.04 and Debian 9 to 13, from Launchpad and sources.debian.org. Package dates bound when a default became reachable by apt, not when any operator upgraded; the Debian 9 step is 55 blocks in one corpus, APNIC-heavy, with one block a third of it.</a:t>
             </a:r>
           </a:p>
           <a:p>
@@ -15102,7 +15698,7 @@
                 </a:solidFill>
                 <a:latin typeface="Segoe UI"/>
               </a:rPr>
-              <a:t>Reverse DNS tells the auto-update story directly. New signings ignored the Knot 2.1.0 and PowerDNS 4.0.0 defaults (0.2% -&gt; 0.3% and 0.3% -&gt; 0.2% ECDSA in the year either side) and only moved around BIND 9.16.0 (22.8% -&gt; 38.8%), which Ubuntu 20.04 and Debian 11 carried. Reverse operators run BIND; the defaults that reached them were BIND's.</a:t>
+              <a:t>Reverse DNS tells the auto-update story directly, and the OS release is the event, not the upstream one. New signings ignored the Knot 2.1.0 and PowerDNS 4.0.0 defaults on their upstream dates (0.2% -&gt; 0.3% and 0.3% -&gt; 0.2% ECDSA in the year either side) and ignored Ubuntu 16.04, which carried only Knot's. In the year after Debian 9 (2017-06-17) shipped both PowerDNS 4.0.3 and Knot 2.4.0 with ECDSA default, the share went 0.2% -&gt; 57.1% and the blocks choosing it 3 -&gt; 55. BIND 9.16.0 (Ubuntu 20.04, Debian 11) added a second step (22.8% -&gt; 38.8%).</a:t>
             </a:r>
           </a:p>
         </p:txBody>
@@ -15284,7 +15880,7 @@
         </p:nvGraphicFramePr>
         <p:xfrm>
           <a:off x="731520" y="4343400"/>
-          <a:ext cx="10332720" cy="1920240"/>
+          <a:ext cx="11247120" cy="2743200"/>
         </p:xfrm>
         <a:graphic>
           <a:graphicData uri="http://schemas.openxmlformats.org/drawingml/2006/table">
@@ -15293,13 +15889,13 @@
                 <a:tableStyleId>{5C22544A-7EE6-4342-B048-85BDC9FD1C3A}</a:tableStyleId>
               </a:tblPr>
               <a:tblGrid>
-                <a:gridCol w="2103120"/>
+                <a:gridCol w="3017520"/>
                 <a:gridCol w="822960"/>
                 <a:gridCol w="822960"/>
-                <a:gridCol w="1828800"/>
-                <a:gridCol w="1463040"/>
-                <a:gridCol w="1828800"/>
-                <a:gridCol w="1463040"/>
+                <a:gridCol w="1554480"/>
+                <a:gridCol w="1737360"/>
+                <a:gridCol w="1554480"/>
+                <a:gridCol w="1737360"/>
               </a:tblGrid>
               <a:tr h="274320">
                 <a:tc>
@@ -15457,7 +16053,7 @@
                     <a:lstStyle/>
                     <a:p>
                       <a:r>
-                        <a:rPr sz="900" b="0">
+                        <a:rPr sz="850" b="0">
                           <a:solidFill>
                             <a:srgbClr val="0B0B0B"/>
                           </a:solidFill>
@@ -15478,7 +16074,7 @@
                     <a:lstStyle/>
                     <a:p>
                       <a:r>
-                        <a:rPr sz="900" b="0">
+                        <a:rPr sz="850" b="0">
                           <a:solidFill>
                             <a:srgbClr val="0B0B0B"/>
                           </a:solidFill>
@@ -15499,7 +16095,7 @@
                     <a:lstStyle/>
                     <a:p>
                       <a:r>
-                        <a:rPr sz="900" b="0">
+                        <a:rPr sz="850" b="0">
                           <a:solidFill>
                             <a:srgbClr val="0B0B0B"/>
                           </a:solidFill>
@@ -15520,7 +16116,7 @@
                     <a:lstStyle/>
                     <a:p>
                       <a:r>
-                        <a:rPr sz="900" b="0">
+                        <a:rPr sz="850" b="0">
                           <a:solidFill>
                             <a:srgbClr val="0B0B0B"/>
                           </a:solidFill>
@@ -15541,7 +16137,7 @@
                     <a:lstStyle/>
                     <a:p>
                       <a:r>
-                        <a:rPr sz="900" b="0">
+                        <a:rPr sz="850" b="0">
                           <a:solidFill>
                             <a:srgbClr val="0B0B0B"/>
                           </a:solidFill>
@@ -15562,7 +16158,7 @@
                     <a:lstStyle/>
                     <a:p>
                       <a:r>
-                        <a:rPr sz="900" b="0">
+                        <a:rPr sz="850" b="0">
                           <a:solidFill>
                             <a:srgbClr val="0B0B0B"/>
                           </a:solidFill>
@@ -15583,7 +16179,7 @@
                     <a:lstStyle/>
                     <a:p>
                       <a:r>
-                        <a:rPr sz="900" b="0">
+                        <a:rPr sz="850" b="0">
                           <a:solidFill>
                             <a:srgbClr val="0B0B0B"/>
                           </a:solidFill>
@@ -15606,7 +16202,7 @@
                     <a:lstStyle/>
                     <a:p>
                       <a:r>
-                        <a:rPr sz="900" b="0">
+                        <a:rPr sz="850" b="0">
                           <a:solidFill>
                             <a:srgbClr val="0B0B0B"/>
                           </a:solidFill>
@@ -15627,7 +16223,7 @@
                     <a:lstStyle/>
                     <a:p>
                       <a:r>
-                        <a:rPr sz="900" b="0">
+                        <a:rPr sz="850" b="0">
                           <a:solidFill>
                             <a:srgbClr val="0B0B0B"/>
                           </a:solidFill>
@@ -15648,7 +16244,7 @@
                     <a:lstStyle/>
                     <a:p>
                       <a:r>
-                        <a:rPr sz="900" b="0">
+                        <a:rPr sz="850" b="0">
                           <a:solidFill>
                             <a:srgbClr val="0B0B0B"/>
                           </a:solidFill>
@@ -15669,7 +16265,7 @@
                     <a:lstStyle/>
                     <a:p>
                       <a:r>
-                        <a:rPr sz="900" b="0">
+                        <a:rPr sz="850" b="0">
                           <a:solidFill>
                             <a:srgbClr val="0B0B0B"/>
                           </a:solidFill>
@@ -15690,7 +16286,7 @@
                     <a:lstStyle/>
                     <a:p>
                       <a:r>
-                        <a:rPr sz="900" b="0">
+                        <a:rPr sz="850" b="0">
                           <a:solidFill>
                             <a:srgbClr val="0B0B0B"/>
                           </a:solidFill>
@@ -15711,7 +16307,7 @@
                     <a:lstStyle/>
                     <a:p>
                       <a:r>
-                        <a:rPr sz="900" b="0">
+                        <a:rPr sz="850" b="0">
                           <a:solidFill>
                             <a:srgbClr val="0B0B0B"/>
                           </a:solidFill>
@@ -15732,7 +16328,7 @@
                     <a:lstStyle/>
                     <a:p>
                       <a:r>
-                        <a:rPr sz="900" b="0">
+                        <a:rPr sz="850" b="0">
                           <a:solidFill>
                             <a:srgbClr val="0B0B0B"/>
                           </a:solidFill>
@@ -15755,7 +16351,7 @@
                     <a:lstStyle/>
                     <a:p>
                       <a:r>
-                        <a:rPr sz="900" b="0">
+                        <a:rPr sz="850" b="0">
                           <a:solidFill>
                             <a:srgbClr val="0B0B0B"/>
                           </a:solidFill>
@@ -15776,7 +16372,7 @@
                     <a:lstStyle/>
                     <a:p>
                       <a:r>
-                        <a:rPr sz="900" b="0">
+                        <a:rPr sz="850" b="0">
                           <a:solidFill>
                             <a:srgbClr val="0B0B0B"/>
                           </a:solidFill>
@@ -15797,7 +16393,7 @@
                     <a:lstStyle/>
                     <a:p>
                       <a:r>
-                        <a:rPr sz="900" b="0">
+                        <a:rPr sz="850" b="0">
                           <a:solidFill>
                             <a:srgbClr val="0B0B0B"/>
                           </a:solidFill>
@@ -15818,7 +16414,7 @@
                     <a:lstStyle/>
                     <a:p>
                       <a:r>
-                        <a:rPr sz="900" b="0">
+                        <a:rPr sz="850" b="0">
                           <a:solidFill>
                             <a:srgbClr val="0B0B0B"/>
                           </a:solidFill>
@@ -15839,7 +16435,7 @@
                     <a:lstStyle/>
                     <a:p>
                       <a:r>
-                        <a:rPr sz="900" b="0">
+                        <a:rPr sz="850" b="0">
                           <a:solidFill>
                             <a:srgbClr val="0B0B0B"/>
                           </a:solidFill>
@@ -15860,7 +16456,7 @@
                     <a:lstStyle/>
                     <a:p>
                       <a:r>
-                        <a:rPr sz="900" b="0">
+                        <a:rPr sz="850" b="0">
                           <a:solidFill>
                             <a:srgbClr val="0B0B0B"/>
                           </a:solidFill>
@@ -15881,7 +16477,7 @@
                     <a:lstStyle/>
                     <a:p>
                       <a:r>
-                        <a:rPr sz="900" b="0">
+                        <a:rPr sz="850" b="0">
                           <a:solidFill>
                             <a:srgbClr val="0B0B0B"/>
                           </a:solidFill>
@@ -15904,7 +16500,7 @@
                     <a:lstStyle/>
                     <a:p>
                       <a:r>
-                        <a:rPr sz="900" b="0">
+                        <a:rPr sz="850" b="0">
                           <a:solidFill>
                             <a:srgbClr val="0B0B0B"/>
                           </a:solidFill>
@@ -15925,7 +16521,7 @@
                     <a:lstStyle/>
                     <a:p>
                       <a:r>
-                        <a:rPr sz="900" b="0">
+                        <a:rPr sz="850" b="0">
                           <a:solidFill>
                             <a:srgbClr val="0B0B0B"/>
                           </a:solidFill>
@@ -15946,7 +16542,7 @@
                     <a:lstStyle/>
                     <a:p>
                       <a:r>
-                        <a:rPr sz="900" b="0">
+                        <a:rPr sz="850" b="0">
                           <a:solidFill>
                             <a:srgbClr val="0B0B0B"/>
                           </a:solidFill>
@@ -15967,7 +16563,7 @@
                     <a:lstStyle/>
                     <a:p>
                       <a:r>
-                        <a:rPr sz="900" b="0">
+                        <a:rPr sz="850" b="0">
                           <a:solidFill>
                             <a:srgbClr val="0B0B0B"/>
                           </a:solidFill>
@@ -15988,7 +16584,7 @@
                     <a:lstStyle/>
                     <a:p>
                       <a:r>
-                        <a:rPr sz="900" b="0">
+                        <a:rPr sz="850" b="0">
                           <a:solidFill>
                             <a:srgbClr val="0B0B0B"/>
                           </a:solidFill>
@@ -16009,7 +16605,7 @@
                     <a:lstStyle/>
                     <a:p>
                       <a:r>
-                        <a:rPr sz="900" b="0">
+                        <a:rPr sz="850" b="0">
                           <a:solidFill>
                             <a:srgbClr val="0B0B0B"/>
                           </a:solidFill>
@@ -16030,7 +16626,7 @@
                     <a:lstStyle/>
                     <a:p>
                       <a:r>
-                        <a:rPr sz="900" b="0">
+                        <a:rPr sz="850" b="0">
                           <a:solidFill>
                             <a:srgbClr val="0B0B0B"/>
                           </a:solidFill>
@@ -16053,7 +16649,7 @@
                     <a:lstStyle/>
                     <a:p>
                       <a:r>
-                        <a:rPr sz="900" b="0">
+                        <a:rPr sz="850" b="0">
                           <a:solidFill>
                             <a:srgbClr val="0B0B0B"/>
                           </a:solidFill>
@@ -16074,7 +16670,7 @@
                     <a:lstStyle/>
                     <a:p>
                       <a:r>
-                        <a:rPr sz="900" b="0">
+                        <a:rPr sz="850" b="0">
                           <a:solidFill>
                             <a:srgbClr val="0B0B0B"/>
                           </a:solidFill>
@@ -16095,7 +16691,7 @@
                     <a:lstStyle/>
                     <a:p>
                       <a:r>
-                        <a:rPr sz="900" b="0">
+                        <a:rPr sz="850" b="0">
                           <a:solidFill>
                             <a:srgbClr val="0B0B0B"/>
                           </a:solidFill>
@@ -16116,7 +16712,7 @@
                     <a:lstStyle/>
                     <a:p>
                       <a:r>
-                        <a:rPr sz="900" b="0">
+                        <a:rPr sz="850" b="0">
                           <a:solidFill>
                             <a:srgbClr val="0B0B0B"/>
                           </a:solidFill>
@@ -16137,7 +16733,7 @@
                     <a:lstStyle/>
                     <a:p>
                       <a:r>
-                        <a:rPr sz="900" b="0">
+                        <a:rPr sz="850" b="0">
                           <a:solidFill>
                             <a:srgbClr val="0B0B0B"/>
                           </a:solidFill>
@@ -16158,7 +16754,7 @@
                     <a:lstStyle/>
                     <a:p>
                       <a:r>
-                        <a:rPr sz="900" b="0">
+                        <a:rPr sz="850" b="0">
                           <a:solidFill>
                             <a:srgbClr val="0B0B0B"/>
                           </a:solidFill>
@@ -16179,7 +16775,7 @@
                     <a:lstStyle/>
                     <a:p>
                       <a:r>
-                        <a:rPr sz="900" b="0">
+                        <a:rPr sz="850" b="0">
                           <a:solidFill>
                             <a:srgbClr val="0B0B0B"/>
                           </a:solidFill>
@@ -16202,7 +16798,7 @@
                     <a:lstStyle/>
                     <a:p>
                       <a:r>
-                        <a:rPr sz="900" b="0">
+                        <a:rPr sz="850" b="0">
                           <a:solidFill>
                             <a:srgbClr val="0B0B0B"/>
                           </a:solidFill>
@@ -16223,7 +16819,7 @@
                     <a:lstStyle/>
                     <a:p>
                       <a:r>
-                        <a:rPr sz="900" b="0">
+                        <a:rPr sz="850" b="0">
                           <a:solidFill>
                             <a:srgbClr val="0B0B0B"/>
                           </a:solidFill>
@@ -16244,7 +16840,7 @@
                     <a:lstStyle/>
                     <a:p>
                       <a:r>
-                        <a:rPr sz="900" b="0">
+                        <a:rPr sz="850" b="0">
                           <a:solidFill>
                             <a:srgbClr val="0B0B0B"/>
                           </a:solidFill>
@@ -16265,7 +16861,7 @@
                     <a:lstStyle/>
                     <a:p>
                       <a:r>
-                        <a:rPr sz="900" b="0">
+                        <a:rPr sz="850" b="0">
                           <a:solidFill>
                             <a:srgbClr val="0B0B0B"/>
                           </a:solidFill>
@@ -16286,7 +16882,7 @@
                     <a:lstStyle/>
                     <a:p>
                       <a:r>
-                        <a:rPr sz="900" b="0">
+                        <a:rPr sz="850" b="0">
                           <a:solidFill>
                             <a:srgbClr val="0B0B0B"/>
                           </a:solidFill>
@@ -16307,7 +16903,7 @@
                     <a:lstStyle/>
                     <a:p>
                       <a:r>
-                        <a:rPr sz="900" b="0">
+                        <a:rPr sz="850" b="0">
                           <a:solidFill>
                             <a:srgbClr val="0B0B0B"/>
                           </a:solidFill>
@@ -16328,12 +16924,459 @@
                     <a:lstStyle/>
                     <a:p>
                       <a:r>
-                        <a:rPr sz="900" b="0">
+                        <a:rPr sz="850" b="0">
                           <a:solidFill>
                             <a:srgbClr val="0B0B0B"/>
                           </a:solidFill>
                         </a:rPr>
                         <a:t>0.0%</a:t>
+                      </a:r>
+                    </a:p>
+                  </a:txBody>
+                  <a:tcPr marL="45720" marR="45720" marT="27432" marB="27432">
+                    <a:solidFill>
+                      <a:srgbClr val="FCFCFB"/>
+                    </a:solidFill>
+                  </a:tcPr>
+                </a:tc>
+              </a:tr>
+              <a:tr h="274320">
+                <a:tc>
+                  <a:txBody>
+                    <a:bodyPr/>
+                    <a:lstStyle/>
+                    <a:p>
+                      <a:r>
+                        <a:rPr sz="850" b="0">
+                          <a:solidFill>
+                            <a:srgbClr val="0B0B0B"/>
+                          </a:solidFill>
+                        </a:rPr>
+                        <a:t>Ubuntu 16.04: Knot DNS 2.1.0</a:t>
+                      </a:r>
+                    </a:p>
+                  </a:txBody>
+                  <a:tcPr marL="45720" marR="45720" marT="27432" marB="27432">
+                    <a:solidFill>
+                      <a:srgbClr val="FCFCFB"/>
+                    </a:solidFill>
+                  </a:tcPr>
+                </a:tc>
+                <a:tc>
+                  <a:txBody>
+                    <a:bodyPr/>
+                    <a:lstStyle/>
+                    <a:p>
+                      <a:r>
+                        <a:rPr sz="850" b="0">
+                          <a:solidFill>
+                            <a:srgbClr val="0B0B0B"/>
+                          </a:solidFill>
+                        </a:rPr>
+                        <a:t>OS package</a:t>
+                      </a:r>
+                    </a:p>
+                  </a:txBody>
+                  <a:tcPr marL="45720" marR="45720" marT="27432" marB="27432">
+                    <a:solidFill>
+                      <a:srgbClr val="FCFCFB"/>
+                    </a:solidFill>
+                  </a:tcPr>
+                </a:tc>
+                <a:tc>
+                  <a:txBody>
+                    <a:bodyPr/>
+                    <a:lstStyle/>
+                    <a:p>
+                      <a:r>
+                        <a:rPr sz="850" b="0">
+                          <a:solidFill>
+                            <a:srgbClr val="0B0B0B"/>
+                          </a:solidFill>
+                        </a:rPr>
+                        <a:t>2016-04</a:t>
+                      </a:r>
+                    </a:p>
+                  </a:txBody>
+                  <a:tcPr marL="45720" marR="45720" marT="27432" marB="27432">
+                    <a:solidFill>
+                      <a:srgbClr val="FCFCFB"/>
+                    </a:solidFill>
+                  </a:tcPr>
+                </a:tc>
+                <a:tc>
+                  <a:txBody>
+                    <a:bodyPr/>
+                    <a:lstStyle/>
+                    <a:p>
+                      <a:r>
+                        <a:rPr sz="850" b="0">
+                          <a:solidFill>
+                            <a:srgbClr val="0B0B0B"/>
+                          </a:solidFill>
+                        </a:rPr>
+                        <a:t>924</a:t>
+                      </a:r>
+                    </a:p>
+                  </a:txBody>
+                  <a:tcPr marL="45720" marR="45720" marT="27432" marB="27432">
+                    <a:solidFill>
+                      <a:srgbClr val="FCFCFB"/>
+                    </a:solidFill>
+                  </a:tcPr>
+                </a:tc>
+                <a:tc>
+                  <a:txBody>
+                    <a:bodyPr/>
+                    <a:lstStyle/>
+                    <a:p>
+                      <a:r>
+                        <a:rPr sz="850" b="0">
+                          <a:solidFill>
+                            <a:srgbClr val="0B0B0B"/>
+                          </a:solidFill>
+                        </a:rPr>
+                        <a:t>0.2% (2 blocks)</a:t>
+                      </a:r>
+                    </a:p>
+                  </a:txBody>
+                  <a:tcPr marL="45720" marR="45720" marT="27432" marB="27432">
+                    <a:solidFill>
+                      <a:srgbClr val="FCFCFB"/>
+                    </a:solidFill>
+                  </a:tcPr>
+                </a:tc>
+                <a:tc>
+                  <a:txBody>
+                    <a:bodyPr/>
+                    <a:lstStyle/>
+                    <a:p>
+                      <a:r>
+                        <a:rPr sz="850" b="0">
+                          <a:solidFill>
+                            <a:srgbClr val="0B0B0B"/>
+                          </a:solidFill>
+                        </a:rPr>
+                        <a:t>1237</a:t>
+                      </a:r>
+                    </a:p>
+                  </a:txBody>
+                  <a:tcPr marL="45720" marR="45720" marT="27432" marB="27432">
+                    <a:solidFill>
+                      <a:srgbClr val="FCFCFB"/>
+                    </a:solidFill>
+                  </a:tcPr>
+                </a:tc>
+                <a:tc>
+                  <a:txBody>
+                    <a:bodyPr/>
+                    <a:lstStyle/>
+                    <a:p>
+                      <a:r>
+                        <a:rPr sz="850" b="0">
+                          <a:solidFill>
+                            <a:srgbClr val="0B0B0B"/>
+                          </a:solidFill>
+                        </a:rPr>
+                        <a:t>0.2% (3 blocks)</a:t>
+                      </a:r>
+                    </a:p>
+                  </a:txBody>
+                  <a:tcPr marL="45720" marR="45720" marT="27432" marB="27432">
+                    <a:solidFill>
+                      <a:srgbClr val="FCFCFB"/>
+                    </a:solidFill>
+                  </a:tcPr>
+                </a:tc>
+              </a:tr>
+              <a:tr h="274320">
+                <a:tc>
+                  <a:txBody>
+                    <a:bodyPr/>
+                    <a:lstStyle/>
+                    <a:p>
+                      <a:r>
+                        <a:rPr sz="850" b="0">
+                          <a:solidFill>
+                            <a:srgbClr val="0B0B0B"/>
+                          </a:solidFill>
+                        </a:rPr>
+                        <a:t>Debian 9: Knot DNS 2.1.0, PowerDNS Auth 4.0.0</a:t>
+                      </a:r>
+                    </a:p>
+                  </a:txBody>
+                  <a:tcPr marL="45720" marR="45720" marT="27432" marB="27432">
+                    <a:solidFill>
+                      <a:srgbClr val="FCFCFB"/>
+                    </a:solidFill>
+                  </a:tcPr>
+                </a:tc>
+                <a:tc>
+                  <a:txBody>
+                    <a:bodyPr/>
+                    <a:lstStyle/>
+                    <a:p>
+                      <a:r>
+                        <a:rPr sz="850" b="0">
+                          <a:solidFill>
+                            <a:srgbClr val="0B0B0B"/>
+                          </a:solidFill>
+                        </a:rPr>
+                        <a:t>OS package</a:t>
+                      </a:r>
+                    </a:p>
+                  </a:txBody>
+                  <a:tcPr marL="45720" marR="45720" marT="27432" marB="27432">
+                    <a:solidFill>
+                      <a:srgbClr val="FCFCFB"/>
+                    </a:solidFill>
+                  </a:tcPr>
+                </a:tc>
+                <a:tc>
+                  <a:txBody>
+                    <a:bodyPr/>
+                    <a:lstStyle/>
+                    <a:p>
+                      <a:r>
+                        <a:rPr sz="850" b="0">
+                          <a:solidFill>
+                            <a:srgbClr val="0B0B0B"/>
+                          </a:solidFill>
+                        </a:rPr>
+                        <a:t>2017-06</a:t>
+                      </a:r>
+                    </a:p>
+                  </a:txBody>
+                  <a:tcPr marL="45720" marR="45720" marT="27432" marB="27432">
+                    <a:solidFill>
+                      <a:srgbClr val="FCFCFB"/>
+                    </a:solidFill>
+                  </a:tcPr>
+                </a:tc>
+                <a:tc>
+                  <a:txBody>
+                    <a:bodyPr/>
+                    <a:lstStyle/>
+                    <a:p>
+                      <a:r>
+                        <a:rPr sz="850" b="0">
+                          <a:solidFill>
+                            <a:srgbClr val="0B0B0B"/>
+                          </a:solidFill>
+                        </a:rPr>
+                        <a:t>1247</a:t>
+                      </a:r>
+                    </a:p>
+                  </a:txBody>
+                  <a:tcPr marL="45720" marR="45720" marT="27432" marB="27432">
+                    <a:solidFill>
+                      <a:srgbClr val="FCFCFB"/>
+                    </a:solidFill>
+                  </a:tcPr>
+                </a:tc>
+                <a:tc>
+                  <a:txBody>
+                    <a:bodyPr/>
+                    <a:lstStyle/>
+                    <a:p>
+                      <a:r>
+                        <a:rPr sz="850" b="0">
+                          <a:solidFill>
+                            <a:srgbClr val="0B0B0B"/>
+                          </a:solidFill>
+                        </a:rPr>
+                        <a:t>0.2% (3 blocks)</a:t>
+                      </a:r>
+                    </a:p>
+                  </a:txBody>
+                  <a:tcPr marL="45720" marR="45720" marT="27432" marB="27432">
+                    <a:solidFill>
+                      <a:srgbClr val="FCFCFB"/>
+                    </a:solidFill>
+                  </a:tcPr>
+                </a:tc>
+                <a:tc>
+                  <a:txBody>
+                    <a:bodyPr/>
+                    <a:lstStyle/>
+                    <a:p>
+                      <a:r>
+                        <a:rPr sz="850" b="0">
+                          <a:solidFill>
+                            <a:srgbClr val="0B0B0B"/>
+                          </a:solidFill>
+                        </a:rPr>
+                        <a:t>597</a:t>
+                      </a:r>
+                    </a:p>
+                  </a:txBody>
+                  <a:tcPr marL="45720" marR="45720" marT="27432" marB="27432">
+                    <a:solidFill>
+                      <a:srgbClr val="FCFCFB"/>
+                    </a:solidFill>
+                  </a:tcPr>
+                </a:tc>
+                <a:tc>
+                  <a:txBody>
+                    <a:bodyPr/>
+                    <a:lstStyle/>
+                    <a:p>
+                      <a:r>
+                        <a:rPr sz="850" b="0">
+                          <a:solidFill>
+                            <a:srgbClr val="0B0B0B"/>
+                          </a:solidFill>
+                        </a:rPr>
+                        <a:t>57.1% (55 blocks)</a:t>
+                      </a:r>
+                    </a:p>
+                  </a:txBody>
+                  <a:tcPr marL="45720" marR="45720" marT="27432" marB="27432">
+                    <a:solidFill>
+                      <a:srgbClr val="FCFCFB"/>
+                    </a:solidFill>
+                  </a:tcPr>
+                </a:tc>
+              </a:tr>
+              <a:tr h="274320">
+                <a:tc>
+                  <a:txBody>
+                    <a:bodyPr/>
+                    <a:lstStyle/>
+                    <a:p>
+                      <a:r>
+                        <a:rPr sz="850" b="0">
+                          <a:solidFill>
+                            <a:srgbClr val="0B0B0B"/>
+                          </a:solidFill>
+                        </a:rPr>
+                        <a:t>Ubuntu 18.04: PowerDNS Auth 4.0.0</a:t>
+                      </a:r>
+                    </a:p>
+                  </a:txBody>
+                  <a:tcPr marL="45720" marR="45720" marT="27432" marB="27432">
+                    <a:solidFill>
+                      <a:srgbClr val="FCFCFB"/>
+                    </a:solidFill>
+                  </a:tcPr>
+                </a:tc>
+                <a:tc>
+                  <a:txBody>
+                    <a:bodyPr/>
+                    <a:lstStyle/>
+                    <a:p>
+                      <a:r>
+                        <a:rPr sz="850" b="0">
+                          <a:solidFill>
+                            <a:srgbClr val="0B0B0B"/>
+                          </a:solidFill>
+                        </a:rPr>
+                        <a:t>OS package</a:t>
+                      </a:r>
+                    </a:p>
+                  </a:txBody>
+                  <a:tcPr marL="45720" marR="45720" marT="27432" marB="27432">
+                    <a:solidFill>
+                      <a:srgbClr val="FCFCFB"/>
+                    </a:solidFill>
+                  </a:tcPr>
+                </a:tc>
+                <a:tc>
+                  <a:txBody>
+                    <a:bodyPr/>
+                    <a:lstStyle/>
+                    <a:p>
+                      <a:r>
+                        <a:rPr sz="850" b="0">
+                          <a:solidFill>
+                            <a:srgbClr val="0B0B0B"/>
+                          </a:solidFill>
+                        </a:rPr>
+                        <a:t>2018-04</a:t>
+                      </a:r>
+                    </a:p>
+                  </a:txBody>
+                  <a:tcPr marL="45720" marR="45720" marT="27432" marB="27432">
+                    <a:solidFill>
+                      <a:srgbClr val="FCFCFB"/>
+                    </a:solidFill>
+                  </a:tcPr>
+                </a:tc>
+                <a:tc>
+                  <a:txBody>
+                    <a:bodyPr/>
+                    <a:lstStyle/>
+                    <a:p>
+                      <a:r>
+                        <a:rPr sz="850" b="0">
+                          <a:solidFill>
+                            <a:srgbClr val="0B0B0B"/>
+                          </a:solidFill>
+                        </a:rPr>
+                        <a:t>473</a:t>
+                      </a:r>
+                    </a:p>
+                  </a:txBody>
+                  <a:tcPr marL="45720" marR="45720" marT="27432" marB="27432">
+                    <a:solidFill>
+                      <a:srgbClr val="FCFCFB"/>
+                    </a:solidFill>
+                  </a:tcPr>
+                </a:tc>
+                <a:tc>
+                  <a:txBody>
+                    <a:bodyPr/>
+                    <a:lstStyle/>
+                    <a:p>
+                      <a:r>
+                        <a:rPr sz="850" b="0">
+                          <a:solidFill>
+                            <a:srgbClr val="0B0B0B"/>
+                          </a:solidFill>
+                        </a:rPr>
+                        <a:t>42.5% (35 blocks)</a:t>
+                      </a:r>
+                    </a:p>
+                  </a:txBody>
+                  <a:tcPr marL="45720" marR="45720" marT="27432" marB="27432">
+                    <a:solidFill>
+                      <a:srgbClr val="FCFCFB"/>
+                    </a:solidFill>
+                  </a:tcPr>
+                </a:tc>
+                <a:tc>
+                  <a:txBody>
+                    <a:bodyPr/>
+                    <a:lstStyle/>
+                    <a:p>
+                      <a:r>
+                        <a:rPr sz="850" b="0">
+                          <a:solidFill>
+                            <a:srgbClr val="0B0B0B"/>
+                          </a:solidFill>
+                        </a:rPr>
+                        <a:t>1507</a:t>
+                      </a:r>
+                    </a:p>
+                  </a:txBody>
+                  <a:tcPr marL="45720" marR="45720" marT="27432" marB="27432">
+                    <a:solidFill>
+                      <a:srgbClr val="FCFCFB"/>
+                    </a:solidFill>
+                  </a:tcPr>
+                </a:tc>
+                <a:tc>
+                  <a:txBody>
+                    <a:bodyPr/>
+                    <a:lstStyle/>
+                    <a:p>
+                      <a:r>
+                        <a:rPr sz="850" b="0">
+                          <a:solidFill>
+                            <a:srgbClr val="0B0B0B"/>
+                          </a:solidFill>
+                        </a:rPr>
+                        <a:t>36.0% (58 blocks)</a:t>
                       </a:r>
                     </a:p>
                   </a:txBody>

--- a/out/analysis/dnssec_program_rfc_cases.pptx
+++ b/out/analysis/dnssec_program_rfc_cases.pptx
@@ -3415,8 +3415,8 @@
         </p:blipFill>
         <p:spPr>
           <a:xfrm>
-            <a:off x="1175978" y="1188720"/>
-            <a:ext cx="9839739" cy="3017520"/>
+            <a:off x="2070499" y="1143000"/>
+            <a:ext cx="8050696" cy="2468880"/>
           </a:xfrm>
           <a:prstGeom prst="rect">
             <a:avLst/>
@@ -3432,8 +3432,8 @@
           <p:nvPr/>
         </p:nvGraphicFramePr>
         <p:xfrm>
-          <a:off x="731520" y="4343400"/>
-          <a:ext cx="11247120" cy="1645920"/>
+          <a:off x="731520" y="3749039"/>
+          <a:ext cx="11247120" cy="1371600"/>
         </p:xfrm>
         <a:graphic>
           <a:graphicData uri="http://schemas.openxmlformats.org/drawingml/2006/table">
@@ -3887,155 +3887,6 @@
                           </a:solidFill>
                         </a:rPr>
                         <a:t>69.6%</a:t>
-                      </a:r>
-                    </a:p>
-                  </a:txBody>
-                  <a:tcPr marL="45720" marR="45720" marT="27432" marB="27432">
-                    <a:solidFill>
-                      <a:srgbClr val="FCFCFB"/>
-                    </a:solidFill>
-                  </a:tcPr>
-                </a:tc>
-              </a:tr>
-              <a:tr h="274320">
-                <a:tc>
-                  <a:txBody>
-                    <a:bodyPr/>
-                    <a:lstStyle/>
-                    <a:p>
-                      <a:r>
-                        <a:rPr sz="850" b="0">
-                          <a:solidFill>
-                            <a:srgbClr val="0B0B0B"/>
-                          </a:solidFill>
-                        </a:rPr>
-                        <a:t>BIND 9 9.7.0</a:t>
-                      </a:r>
-                    </a:p>
-                  </a:txBody>
-                  <a:tcPr marL="45720" marR="45720" marT="27432" marB="27432">
-                    <a:solidFill>
-                      <a:srgbClr val="FCFCFB"/>
-                    </a:solidFill>
-                  </a:tcPr>
-                </a:tc>
-                <a:tc>
-                  <a:txBody>
-                    <a:bodyPr/>
-                    <a:lstStyle/>
-                    <a:p>
-                      <a:r>
-                        <a:rPr sz="850" b="0">
-                          <a:solidFill>
-                            <a:srgbClr val="0B0B0B"/>
-                          </a:solidFill>
-                        </a:rPr>
-                        <a:t>support</a:t>
-                      </a:r>
-                    </a:p>
-                  </a:txBody>
-                  <a:tcPr marL="45720" marR="45720" marT="27432" marB="27432">
-                    <a:solidFill>
-                      <a:srgbClr val="FCFCFB"/>
-                    </a:solidFill>
-                  </a:tcPr>
-                </a:tc>
-                <a:tc>
-                  <a:txBody>
-                    <a:bodyPr/>
-                    <a:lstStyle/>
-                    <a:p>
-                      <a:r>
-                        <a:rPr sz="850" b="0">
-                          <a:solidFill>
-                            <a:srgbClr val="0B0B0B"/>
-                          </a:solidFill>
-                        </a:rPr>
-                        <a:t>2010-02</a:t>
-                      </a:r>
-                    </a:p>
-                  </a:txBody>
-                  <a:tcPr marL="45720" marR="45720" marT="27432" marB="27432">
-                    <a:solidFill>
-                      <a:srgbClr val="FCFCFB"/>
-                    </a:solidFill>
-                  </a:tcPr>
-                </a:tc>
-                <a:tc>
-                  <a:txBody>
-                    <a:bodyPr/>
-                    <a:lstStyle/>
-                    <a:p>
-                      <a:r>
-                        <a:rPr sz="850" b="0">
-                          <a:solidFill>
-                            <a:srgbClr val="0B0B0B"/>
-                          </a:solidFill>
-                        </a:rPr>
-                        <a:t>18</a:t>
-                      </a:r>
-                    </a:p>
-                  </a:txBody>
-                  <a:tcPr marL="45720" marR="45720" marT="27432" marB="27432">
-                    <a:solidFill>
-                      <a:srgbClr val="FCFCFB"/>
-                    </a:solidFill>
-                  </a:tcPr>
-                </a:tc>
-                <a:tc>
-                  <a:txBody>
-                    <a:bodyPr/>
-                    <a:lstStyle/>
-                    <a:p>
-                      <a:r>
-                        <a:rPr sz="850" b="0">
-                          <a:solidFill>
-                            <a:srgbClr val="0B0B0B"/>
-                          </a:solidFill>
-                        </a:rPr>
-                        <a:t>0.0%</a:t>
-                      </a:r>
-                    </a:p>
-                  </a:txBody>
-                  <a:tcPr marL="45720" marR="45720" marT="27432" marB="27432">
-                    <a:solidFill>
-                      <a:srgbClr val="FCFCFB"/>
-                    </a:solidFill>
-                  </a:tcPr>
-                </a:tc>
-                <a:tc>
-                  <a:txBody>
-                    <a:bodyPr/>
-                    <a:lstStyle/>
-                    <a:p>
-                      <a:r>
-                        <a:rPr sz="850" b="0">
-                          <a:solidFill>
-                            <a:srgbClr val="0B0B0B"/>
-                          </a:solidFill>
-                        </a:rPr>
-                        <a:t>217</a:t>
-                      </a:r>
-                    </a:p>
-                  </a:txBody>
-                  <a:tcPr marL="45720" marR="45720" marT="27432" marB="27432">
-                    <a:solidFill>
-                      <a:srgbClr val="FCFCFB"/>
-                    </a:solidFill>
-                  </a:tcPr>
-                </a:tc>
-                <a:tc>
-                  <a:txBody>
-                    <a:bodyPr/>
-                    <a:lstStyle/>
-                    <a:p>
-                      <a:r>
-                        <a:rPr sz="850" b="0">
-                          <a:solidFill>
-                            <a:srgbClr val="0B0B0B"/>
-                          </a:solidFill>
-                        </a:rPr>
-                        <a:t>0.9%</a:t>
                       </a:r>
                     </a:p>
                   </a:txBody>
@@ -6131,8 +5982,8 @@
         </p:blipFill>
         <p:spPr>
           <a:xfrm>
-            <a:off x="1175978" y="1188720"/>
-            <a:ext cx="9839739" cy="3017520"/>
+            <a:off x="2070499" y="1143000"/>
+            <a:ext cx="8050696" cy="2468880"/>
           </a:xfrm>
           <a:prstGeom prst="rect">
             <a:avLst/>
@@ -6148,7 +5999,7 @@
           <p:nvPr/>
         </p:nvGraphicFramePr>
         <p:xfrm>
-          <a:off x="731520" y="4343400"/>
+          <a:off x="731520" y="3749039"/>
           <a:ext cx="11247120" cy="1371600"/>
         </p:xfrm>
         <a:graphic>
@@ -9224,8 +9075,8 @@
         </p:blipFill>
         <p:spPr>
           <a:xfrm>
-            <a:off x="1175978" y="1188720"/>
-            <a:ext cx="9839739" cy="3017520"/>
+            <a:off x="2070499" y="1143000"/>
+            <a:ext cx="8050696" cy="2468880"/>
           </a:xfrm>
           <a:prstGeom prst="rect">
             <a:avLst/>
@@ -9241,8 +9092,8 @@
           <p:nvPr/>
         </p:nvGraphicFramePr>
         <p:xfrm>
-          <a:off x="731520" y="4343400"/>
-          <a:ext cx="11247120" cy="1371600"/>
+          <a:off x="731520" y="3749039"/>
+          <a:ext cx="11247120" cy="1097280"/>
         </p:xfrm>
         <a:graphic>
           <a:graphicData uri="http://schemas.openxmlformats.org/drawingml/2006/table">
@@ -9547,155 +9398,6 @@
                           </a:solidFill>
                         </a:rPr>
                         <a:t>1.8%</a:t>
-                      </a:r>
-                    </a:p>
-                  </a:txBody>
-                  <a:tcPr marL="45720" marR="45720" marT="27432" marB="27432">
-                    <a:solidFill>
-                      <a:srgbClr val="FCFCFB"/>
-                    </a:solidFill>
-                  </a:tcPr>
-                </a:tc>
-              </a:tr>
-              <a:tr h="274320">
-                <a:tc>
-                  <a:txBody>
-                    <a:bodyPr/>
-                    <a:lstStyle/>
-                    <a:p>
-                      <a:r>
-                        <a:rPr sz="850" b="0">
-                          <a:solidFill>
-                            <a:srgbClr val="0B0B0B"/>
-                          </a:solidFill>
-                        </a:rPr>
-                        <a:t>BIND 9 9.6.0</a:t>
-                      </a:r>
-                    </a:p>
-                  </a:txBody>
-                  <a:tcPr marL="45720" marR="45720" marT="27432" marB="27432">
-                    <a:solidFill>
-                      <a:srgbClr val="FCFCFB"/>
-                    </a:solidFill>
-                  </a:tcPr>
-                </a:tc>
-                <a:tc>
-                  <a:txBody>
-                    <a:bodyPr/>
-                    <a:lstStyle/>
-                    <a:p>
-                      <a:r>
-                        <a:rPr sz="850" b="0">
-                          <a:solidFill>
-                            <a:srgbClr val="0B0B0B"/>
-                          </a:solidFill>
-                        </a:rPr>
-                        <a:t>support</a:t>
-                      </a:r>
-                    </a:p>
-                  </a:txBody>
-                  <a:tcPr marL="45720" marR="45720" marT="27432" marB="27432">
-                    <a:solidFill>
-                      <a:srgbClr val="FCFCFB"/>
-                    </a:solidFill>
-                  </a:tcPr>
-                </a:tc>
-                <a:tc>
-                  <a:txBody>
-                    <a:bodyPr/>
-                    <a:lstStyle/>
-                    <a:p>
-                      <a:r>
-                        <a:rPr sz="850" b="0">
-                          <a:solidFill>
-                            <a:srgbClr val="0B0B0B"/>
-                          </a:solidFill>
-                        </a:rPr>
-                        <a:t>2008-12</a:t>
-                      </a:r>
-                    </a:p>
-                  </a:txBody>
-                  <a:tcPr marL="45720" marR="45720" marT="27432" marB="27432">
-                    <a:solidFill>
-                      <a:srgbClr val="FCFCFB"/>
-                    </a:solidFill>
-                  </a:tcPr>
-                </a:tc>
-                <a:tc>
-                  <a:txBody>
-                    <a:bodyPr/>
-                    <a:lstStyle/>
-                    <a:p>
-                      <a:r>
-                        <a:rPr sz="850" b="0">
-                          <a:solidFill>
-                            <a:srgbClr val="0B0B0B"/>
-                          </a:solidFill>
-                        </a:rPr>
-                        <a:t>0</a:t>
-                      </a:r>
-                    </a:p>
-                  </a:txBody>
-                  <a:tcPr marL="45720" marR="45720" marT="27432" marB="27432">
-                    <a:solidFill>
-                      <a:srgbClr val="FCFCFB"/>
-                    </a:solidFill>
-                  </a:tcPr>
-                </a:tc>
-                <a:tc>
-                  <a:txBody>
-                    <a:bodyPr/>
-                    <a:lstStyle/>
-                    <a:p>
-                      <a:r>
-                        <a:rPr sz="850" b="0">
-                          <a:solidFill>
-                            <a:srgbClr val="0B0B0B"/>
-                          </a:solidFill>
-                        </a:rPr>
-                        <a:t>-</a:t>
-                      </a:r>
-                    </a:p>
-                  </a:txBody>
-                  <a:tcPr marL="45720" marR="45720" marT="27432" marB="27432">
-                    <a:solidFill>
-                      <a:srgbClr val="FCFCFB"/>
-                    </a:solidFill>
-                  </a:tcPr>
-                </a:tc>
-                <a:tc>
-                  <a:txBody>
-                    <a:bodyPr/>
-                    <a:lstStyle/>
-                    <a:p>
-                      <a:r>
-                        <a:rPr sz="850" b="0">
-                          <a:solidFill>
-                            <a:srgbClr val="0B0B0B"/>
-                          </a:solidFill>
-                        </a:rPr>
-                        <a:t>18</a:t>
-                      </a:r>
-                    </a:p>
-                  </a:txBody>
-                  <a:tcPr marL="45720" marR="45720" marT="27432" marB="27432">
-                    <a:solidFill>
-                      <a:srgbClr val="FCFCFB"/>
-                    </a:solidFill>
-                  </a:tcPr>
-                </a:tc>
-                <a:tc>
-                  <a:txBody>
-                    <a:bodyPr/>
-                    <a:lstStyle/>
-                    <a:p>
-                      <a:r>
-                        <a:rPr sz="850" b="0">
-                          <a:solidFill>
-                            <a:srgbClr val="0B0B0B"/>
-                          </a:solidFill>
-                        </a:rPr>
-                        <a:t>50.0%</a:t>
                       </a:r>
                     </a:p>
                   </a:txBody>
@@ -15862,8 +15564,8 @@
         </p:blipFill>
         <p:spPr>
           <a:xfrm>
-            <a:off x="1175978" y="1188720"/>
-            <a:ext cx="9839739" cy="3017520"/>
+            <a:off x="2070499" y="1143000"/>
+            <a:ext cx="8050696" cy="2468880"/>
           </a:xfrm>
           <a:prstGeom prst="rect">
             <a:avLst/>
@@ -15879,8 +15581,8 @@
           <p:nvPr/>
         </p:nvGraphicFramePr>
         <p:xfrm>
-          <a:off x="731520" y="4343400"/>
-          <a:ext cx="11247120" cy="2743200"/>
+          <a:off x="731520" y="3749039"/>
+          <a:ext cx="11247120" cy="1920240"/>
         </p:xfrm>
         <a:graphic>
           <a:graphicData uri="http://schemas.openxmlformats.org/drawingml/2006/table">
@@ -16483,453 +16185,6 @@
                           </a:solidFill>
                         </a:rPr>
                         <a:t>38.8%</a:t>
-                      </a:r>
-                    </a:p>
-                  </a:txBody>
-                  <a:tcPr marL="45720" marR="45720" marT="27432" marB="27432">
-                    <a:solidFill>
-                      <a:srgbClr val="FCFCFB"/>
-                    </a:solidFill>
-                  </a:tcPr>
-                </a:tc>
-              </a:tr>
-              <a:tr h="274320">
-                <a:tc>
-                  <a:txBody>
-                    <a:bodyPr/>
-                    <a:lstStyle/>
-                    <a:p>
-                      <a:r>
-                        <a:rPr sz="850" b="0">
-                          <a:solidFill>
-                            <a:srgbClr val="0B0B0B"/>
-                          </a:solidFill>
-                        </a:rPr>
-                        <a:t>PowerDNS Auth 3.0.1</a:t>
-                      </a:r>
-                    </a:p>
-                  </a:txBody>
-                  <a:tcPr marL="45720" marR="45720" marT="27432" marB="27432">
-                    <a:solidFill>
-                      <a:srgbClr val="FCFCFB"/>
-                    </a:solidFill>
-                  </a:tcPr>
-                </a:tc>
-                <a:tc>
-                  <a:txBody>
-                    <a:bodyPr/>
-                    <a:lstStyle/>
-                    <a:p>
-                      <a:r>
-                        <a:rPr sz="850" b="0">
-                          <a:solidFill>
-                            <a:srgbClr val="0B0B0B"/>
-                          </a:solidFill>
-                        </a:rPr>
-                        <a:t>support</a:t>
-                      </a:r>
-                    </a:p>
-                  </a:txBody>
-                  <a:tcPr marL="45720" marR="45720" marT="27432" marB="27432">
-                    <a:solidFill>
-                      <a:srgbClr val="FCFCFB"/>
-                    </a:solidFill>
-                  </a:tcPr>
-                </a:tc>
-                <a:tc>
-                  <a:txBody>
-                    <a:bodyPr/>
-                    <a:lstStyle/>
-                    <a:p>
-                      <a:r>
-                        <a:rPr sz="850" b="0">
-                          <a:solidFill>
-                            <a:srgbClr val="0B0B0B"/>
-                          </a:solidFill>
-                        </a:rPr>
-                        <a:t>2012-01</a:t>
-                      </a:r>
-                    </a:p>
-                  </a:txBody>
-                  <a:tcPr marL="45720" marR="45720" marT="27432" marB="27432">
-                    <a:solidFill>
-                      <a:srgbClr val="FCFCFB"/>
-                    </a:solidFill>
-                  </a:tcPr>
-                </a:tc>
-                <a:tc>
-                  <a:txBody>
-                    <a:bodyPr/>
-                    <a:lstStyle/>
-                    <a:p>
-                      <a:r>
-                        <a:rPr sz="850" b="0">
-                          <a:solidFill>
-                            <a:srgbClr val="0B0B0B"/>
-                          </a:solidFill>
-                        </a:rPr>
-                        <a:t>279</a:t>
-                      </a:r>
-                    </a:p>
-                  </a:txBody>
-                  <a:tcPr marL="45720" marR="45720" marT="27432" marB="27432">
-                    <a:solidFill>
-                      <a:srgbClr val="FCFCFB"/>
-                    </a:solidFill>
-                  </a:tcPr>
-                </a:tc>
-                <a:tc>
-                  <a:txBody>
-                    <a:bodyPr/>
-                    <a:lstStyle/>
-                    <a:p>
-                      <a:r>
-                        <a:rPr sz="850" b="0">
-                          <a:solidFill>
-                            <a:srgbClr val="0B0B0B"/>
-                          </a:solidFill>
-                        </a:rPr>
-                        <a:t>0.0%</a:t>
-                      </a:r>
-                    </a:p>
-                  </a:txBody>
-                  <a:tcPr marL="45720" marR="45720" marT="27432" marB="27432">
-                    <a:solidFill>
-                      <a:srgbClr val="FCFCFB"/>
-                    </a:solidFill>
-                  </a:tcPr>
-                </a:tc>
-                <a:tc>
-                  <a:txBody>
-                    <a:bodyPr/>
-                    <a:lstStyle/>
-                    <a:p>
-                      <a:r>
-                        <a:rPr sz="850" b="0">
-                          <a:solidFill>
-                            <a:srgbClr val="0B0B0B"/>
-                          </a:solidFill>
-                        </a:rPr>
-                        <a:t>456</a:t>
-                      </a:r>
-                    </a:p>
-                  </a:txBody>
-                  <a:tcPr marL="45720" marR="45720" marT="27432" marB="27432">
-                    <a:solidFill>
-                      <a:srgbClr val="FCFCFB"/>
-                    </a:solidFill>
-                  </a:tcPr>
-                </a:tc>
-                <a:tc>
-                  <a:txBody>
-                    <a:bodyPr/>
-                    <a:lstStyle/>
-                    <a:p>
-                      <a:r>
-                        <a:rPr sz="850" b="0">
-                          <a:solidFill>
-                            <a:srgbClr val="0B0B0B"/>
-                          </a:solidFill>
-                        </a:rPr>
-                        <a:t>0.0%</a:t>
-                      </a:r>
-                    </a:p>
-                  </a:txBody>
-                  <a:tcPr marL="45720" marR="45720" marT="27432" marB="27432">
-                    <a:solidFill>
-                      <a:srgbClr val="FCFCFB"/>
-                    </a:solidFill>
-                  </a:tcPr>
-                </a:tc>
-              </a:tr>
-              <a:tr h="274320">
-                <a:tc>
-                  <a:txBody>
-                    <a:bodyPr/>
-                    <a:lstStyle/>
-                    <a:p>
-                      <a:r>
-                        <a:rPr sz="850" b="0">
-                          <a:solidFill>
-                            <a:srgbClr val="0B0B0B"/>
-                          </a:solidFill>
-                        </a:rPr>
-                        <a:t>BIND 9 9.8.4</a:t>
-                      </a:r>
-                    </a:p>
-                  </a:txBody>
-                  <a:tcPr marL="45720" marR="45720" marT="27432" marB="27432">
-                    <a:solidFill>
-                      <a:srgbClr val="FCFCFB"/>
-                    </a:solidFill>
-                  </a:tcPr>
-                </a:tc>
-                <a:tc>
-                  <a:txBody>
-                    <a:bodyPr/>
-                    <a:lstStyle/>
-                    <a:p>
-                      <a:r>
-                        <a:rPr sz="850" b="0">
-                          <a:solidFill>
-                            <a:srgbClr val="0B0B0B"/>
-                          </a:solidFill>
-                        </a:rPr>
-                        <a:t>support</a:t>
-                      </a:r>
-                    </a:p>
-                  </a:txBody>
-                  <a:tcPr marL="45720" marR="45720" marT="27432" marB="27432">
-                    <a:solidFill>
-                      <a:srgbClr val="FCFCFB"/>
-                    </a:solidFill>
-                  </a:tcPr>
-                </a:tc>
-                <a:tc>
-                  <a:txBody>
-                    <a:bodyPr/>
-                    <a:lstStyle/>
-                    <a:p>
-                      <a:r>
-                        <a:rPr sz="850" b="0">
-                          <a:solidFill>
-                            <a:srgbClr val="0B0B0B"/>
-                          </a:solidFill>
-                        </a:rPr>
-                        <a:t>2012-09</a:t>
-                      </a:r>
-                    </a:p>
-                  </a:txBody>
-                  <a:tcPr marL="45720" marR="45720" marT="27432" marB="27432">
-                    <a:solidFill>
-                      <a:srgbClr val="FCFCFB"/>
-                    </a:solidFill>
-                  </a:tcPr>
-                </a:tc>
-                <a:tc>
-                  <a:txBody>
-                    <a:bodyPr/>
-                    <a:lstStyle/>
-                    <a:p>
-                      <a:r>
-                        <a:rPr sz="850" b="0">
-                          <a:solidFill>
-                            <a:srgbClr val="0B0B0B"/>
-                          </a:solidFill>
-                        </a:rPr>
-                        <a:t>344</a:t>
-                      </a:r>
-                    </a:p>
-                  </a:txBody>
-                  <a:tcPr marL="45720" marR="45720" marT="27432" marB="27432">
-                    <a:solidFill>
-                      <a:srgbClr val="FCFCFB"/>
-                    </a:solidFill>
-                  </a:tcPr>
-                </a:tc>
-                <a:tc>
-                  <a:txBody>
-                    <a:bodyPr/>
-                    <a:lstStyle/>
-                    <a:p>
-                      <a:r>
-                        <a:rPr sz="850" b="0">
-                          <a:solidFill>
-                            <a:srgbClr val="0B0B0B"/>
-                          </a:solidFill>
-                        </a:rPr>
-                        <a:t>0.0%</a:t>
-                      </a:r>
-                    </a:p>
-                  </a:txBody>
-                  <a:tcPr marL="45720" marR="45720" marT="27432" marB="27432">
-                    <a:solidFill>
-                      <a:srgbClr val="FCFCFB"/>
-                    </a:solidFill>
-                  </a:tcPr>
-                </a:tc>
-                <a:tc>
-                  <a:txBody>
-                    <a:bodyPr/>
-                    <a:lstStyle/>
-                    <a:p>
-                      <a:r>
-                        <a:rPr sz="850" b="0">
-                          <a:solidFill>
-                            <a:srgbClr val="0B0B0B"/>
-                          </a:solidFill>
-                        </a:rPr>
-                        <a:t>406</a:t>
-                      </a:r>
-                    </a:p>
-                  </a:txBody>
-                  <a:tcPr marL="45720" marR="45720" marT="27432" marB="27432">
-                    <a:solidFill>
-                      <a:srgbClr val="FCFCFB"/>
-                    </a:solidFill>
-                  </a:tcPr>
-                </a:tc>
-                <a:tc>
-                  <a:txBody>
-                    <a:bodyPr/>
-                    <a:lstStyle/>
-                    <a:p>
-                      <a:r>
-                        <a:rPr sz="850" b="0">
-                          <a:solidFill>
-                            <a:srgbClr val="0B0B0B"/>
-                          </a:solidFill>
-                        </a:rPr>
-                        <a:t>0.0%</a:t>
-                      </a:r>
-                    </a:p>
-                  </a:txBody>
-                  <a:tcPr marL="45720" marR="45720" marT="27432" marB="27432">
-                    <a:solidFill>
-                      <a:srgbClr val="FCFCFB"/>
-                    </a:solidFill>
-                  </a:tcPr>
-                </a:tc>
-              </a:tr>
-              <a:tr h="274320">
-                <a:tc>
-                  <a:txBody>
-                    <a:bodyPr/>
-                    <a:lstStyle/>
-                    <a:p>
-                      <a:r>
-                        <a:rPr sz="850" b="0">
-                          <a:solidFill>
-                            <a:srgbClr val="0B0B0B"/>
-                          </a:solidFill>
-                        </a:rPr>
-                        <a:t>Knot DNS 1.4.0</a:t>
-                      </a:r>
-                    </a:p>
-                  </a:txBody>
-                  <a:tcPr marL="45720" marR="45720" marT="27432" marB="27432">
-                    <a:solidFill>
-                      <a:srgbClr val="FCFCFB"/>
-                    </a:solidFill>
-                  </a:tcPr>
-                </a:tc>
-                <a:tc>
-                  <a:txBody>
-                    <a:bodyPr/>
-                    <a:lstStyle/>
-                    <a:p>
-                      <a:r>
-                        <a:rPr sz="850" b="0">
-                          <a:solidFill>
-                            <a:srgbClr val="0B0B0B"/>
-                          </a:solidFill>
-                        </a:rPr>
-                        <a:t>support</a:t>
-                      </a:r>
-                    </a:p>
-                  </a:txBody>
-                  <a:tcPr marL="45720" marR="45720" marT="27432" marB="27432">
-                    <a:solidFill>
-                      <a:srgbClr val="FCFCFB"/>
-                    </a:solidFill>
-                  </a:tcPr>
-                </a:tc>
-                <a:tc>
-                  <a:txBody>
-                    <a:bodyPr/>
-                    <a:lstStyle/>
-                    <a:p>
-                      <a:r>
-                        <a:rPr sz="850" b="0">
-                          <a:solidFill>
-                            <a:srgbClr val="0B0B0B"/>
-                          </a:solidFill>
-                        </a:rPr>
-                        <a:t>2013-12</a:t>
-                      </a:r>
-                    </a:p>
-                  </a:txBody>
-                  <a:tcPr marL="45720" marR="45720" marT="27432" marB="27432">
-                    <a:solidFill>
-                      <a:srgbClr val="FCFCFB"/>
-                    </a:solidFill>
-                  </a:tcPr>
-                </a:tc>
-                <a:tc>
-                  <a:txBody>
-                    <a:bodyPr/>
-                    <a:lstStyle/>
-                    <a:p>
-                      <a:r>
-                        <a:rPr sz="850" b="0">
-                          <a:solidFill>
-                            <a:srgbClr val="0B0B0B"/>
-                          </a:solidFill>
-                        </a:rPr>
-                        <a:t>402</a:t>
-                      </a:r>
-                    </a:p>
-                  </a:txBody>
-                  <a:tcPr marL="45720" marR="45720" marT="27432" marB="27432">
-                    <a:solidFill>
-                      <a:srgbClr val="FCFCFB"/>
-                    </a:solidFill>
-                  </a:tcPr>
-                </a:tc>
-                <a:tc>
-                  <a:txBody>
-                    <a:bodyPr/>
-                    <a:lstStyle/>
-                    <a:p>
-                      <a:r>
-                        <a:rPr sz="850" b="0">
-                          <a:solidFill>
-                            <a:srgbClr val="0B0B0B"/>
-                          </a:solidFill>
-                        </a:rPr>
-                        <a:t>0.0%</a:t>
-                      </a:r>
-                    </a:p>
-                  </a:txBody>
-                  <a:tcPr marL="45720" marR="45720" marT="27432" marB="27432">
-                    <a:solidFill>
-                      <a:srgbClr val="FCFCFB"/>
-                    </a:solidFill>
-                  </a:tcPr>
-                </a:tc>
-                <a:tc>
-                  <a:txBody>
-                    <a:bodyPr/>
-                    <a:lstStyle/>
-                    <a:p>
-                      <a:r>
-                        <a:rPr sz="850" b="0">
-                          <a:solidFill>
-                            <a:srgbClr val="0B0B0B"/>
-                          </a:solidFill>
-                        </a:rPr>
-                        <a:t>1331</a:t>
-                      </a:r>
-                    </a:p>
-                  </a:txBody>
-                  <a:tcPr marL="45720" marR="45720" marT="27432" marB="27432">
-                    <a:solidFill>
-                      <a:srgbClr val="FCFCFB"/>
-                    </a:solidFill>
-                  </a:tcPr>
-                </a:tc>
-                <a:tc>
-                  <a:txBody>
-                    <a:bodyPr/>
-                    <a:lstStyle/>
-                    <a:p>
-                      <a:r>
-                        <a:rPr sz="850" b="0">
-                          <a:solidFill>
-                            <a:srgbClr val="0B0B0B"/>
-                          </a:solidFill>
-                        </a:rPr>
-                        <a:t>0.0%</a:t>
                       </a:r>
                     </a:p>
                   </a:txBody>

--- a/out/analysis/dnssec_program_rfc_cases.pptx
+++ b/out/analysis/dnssec_program_rfc_cases.pptx
@@ -9093,7 +9093,7 @@
         </p:nvGraphicFramePr>
         <p:xfrm>
           <a:off x="731520" y="3749039"/>
-          <a:ext cx="11247120" cy="1097280"/>
+          <a:ext cx="11247120" cy="1371600"/>
         </p:xfrm>
         <a:graphic>
           <a:graphicData uri="http://schemas.openxmlformats.org/drawingml/2006/table">
@@ -9696,6 +9696,155 @@
                           </a:solidFill>
                         </a:rPr>
                         <a:t>21.1% (20 blocks)</a:t>
+                      </a:r>
+                    </a:p>
+                  </a:txBody>
+                  <a:tcPr marL="45720" marR="45720" marT="27432" marB="27432">
+                    <a:solidFill>
+                      <a:srgbClr val="FCFCFB"/>
+                    </a:solidFill>
+                  </a:tcPr>
+                </a:tc>
+              </a:tr>
+              <a:tr h="274320">
+                <a:tc>
+                  <a:txBody>
+                    <a:bodyPr/>
+                    <a:lstStyle/>
+                    <a:p>
+                      <a:r>
+                        <a:rPr sz="850" b="0">
+                          <a:solidFill>
+                            <a:srgbClr val="0B0B0B"/>
+                          </a:solidFill>
+                        </a:rPr>
+                        <a:t>RHEL 9: BIND 9 9.7.0</a:t>
+                      </a:r>
+                    </a:p>
+                  </a:txBody>
+                  <a:tcPr marL="45720" marR="45720" marT="27432" marB="27432">
+                    <a:solidFill>
+                      <a:srgbClr val="FCFCFB"/>
+                    </a:solidFill>
+                  </a:tcPr>
+                </a:tc>
+                <a:tc>
+                  <a:txBody>
+                    <a:bodyPr/>
+                    <a:lstStyle/>
+                    <a:p>
+                      <a:r>
+                        <a:rPr sz="850" b="0">
+                          <a:solidFill>
+                            <a:srgbClr val="0B0B0B"/>
+                          </a:solidFill>
+                        </a:rPr>
+                        <a:t>OS package</a:t>
+                      </a:r>
+                    </a:p>
+                  </a:txBody>
+                  <a:tcPr marL="45720" marR="45720" marT="27432" marB="27432">
+                    <a:solidFill>
+                      <a:srgbClr val="FCFCFB"/>
+                    </a:solidFill>
+                  </a:tcPr>
+                </a:tc>
+                <a:tc>
+                  <a:txBody>
+                    <a:bodyPr/>
+                    <a:lstStyle/>
+                    <a:p>
+                      <a:r>
+                        <a:rPr sz="850" b="0">
+                          <a:solidFill>
+                            <a:srgbClr val="0B0B0B"/>
+                          </a:solidFill>
+                        </a:rPr>
+                        <a:t>2022-05</a:t>
+                      </a:r>
+                    </a:p>
+                  </a:txBody>
+                  <a:tcPr marL="45720" marR="45720" marT="27432" marB="27432">
+                    <a:solidFill>
+                      <a:srgbClr val="FCFCFB"/>
+                    </a:solidFill>
+                  </a:tcPr>
+                </a:tc>
+                <a:tc>
+                  <a:txBody>
+                    <a:bodyPr/>
+                    <a:lstStyle/>
+                    <a:p>
+                      <a:r>
+                        <a:rPr sz="850" b="0">
+                          <a:solidFill>
+                            <a:srgbClr val="0B0B0B"/>
+                          </a:solidFill>
+                        </a:rPr>
+                        <a:t>1231</a:t>
+                      </a:r>
+                    </a:p>
+                  </a:txBody>
+                  <a:tcPr marL="45720" marR="45720" marT="27432" marB="27432">
+                    <a:solidFill>
+                      <a:srgbClr val="FCFCFB"/>
+                    </a:solidFill>
+                  </a:tcPr>
+                </a:tc>
+                <a:tc>
+                  <a:txBody>
+                    <a:bodyPr/>
+                    <a:lstStyle/>
+                    <a:p>
+                      <a:r>
+                        <a:rPr sz="850" b="0">
+                          <a:solidFill>
+                            <a:srgbClr val="0B0B0B"/>
+                          </a:solidFill>
+                        </a:rPr>
+                        <a:t>2.9% (7 blocks)</a:t>
+                      </a:r>
+                    </a:p>
+                  </a:txBody>
+                  <a:tcPr marL="45720" marR="45720" marT="27432" marB="27432">
+                    <a:solidFill>
+                      <a:srgbClr val="FCFCFB"/>
+                    </a:solidFill>
+                  </a:tcPr>
+                </a:tc>
+                <a:tc>
+                  <a:txBody>
+                    <a:bodyPr/>
+                    <a:lstStyle/>
+                    <a:p>
+                      <a:r>
+                        <a:rPr sz="850" b="0">
+                          <a:solidFill>
+                            <a:srgbClr val="0B0B0B"/>
+                          </a:solidFill>
+                        </a:rPr>
+                        <a:t>1671</a:t>
+                      </a:r>
+                    </a:p>
+                  </a:txBody>
+                  <a:tcPr marL="45720" marR="45720" marT="27432" marB="27432">
+                    <a:solidFill>
+                      <a:srgbClr val="FCFCFB"/>
+                    </a:solidFill>
+                  </a:tcPr>
+                </a:tc>
+                <a:tc>
+                  <a:txBody>
+                    <a:bodyPr/>
+                    <a:lstStyle/>
+                    <a:p>
+                      <a:r>
+                        <a:rPr sz="850" b="0">
+                          <a:solidFill>
+                            <a:srgbClr val="0B0B0B"/>
+                          </a:solidFill>
+                        </a:rPr>
+                        <a:t>3.4% (11 blocks)</a:t>
                       </a:r>
                     </a:p>
                   </a:txBody>
@@ -13034,7 +13183,23 @@
                 </a:solidFill>
                 <a:latin typeface="Segoe UI"/>
               </a:rPr>
-              <a:t>ECDSA: the Knot 2.1.0 and PowerDNS 4.0.0 defaults changed nothing on their upstream dates (0.2% -&gt; 0.3%, 0.3% -&gt; 0.2%), nor did Ubuntu 16.04 (Knot only). The step is Debian 9 (2017-06-17), the first OS release shipping both ECDSA-default signers: 0.2% -&gt; 57.1% of new signings, 3 -&gt; 55 blocks. A second step came with BIND 9.16.0 (22.8% -&gt; 38.8%) via Ubuntu 20.04 and Debian 11. The update path works -- one OS release at a time, on new zones only, and it never shows as a spike in the adoption curve.</a:t>
+              <a:t>ECDSA: the Knot 2.1.0 and PowerDNS 4.0.0 defaults changed nothing on their upstream dates (0.2% -&gt; 0.3%, 0.3% -&gt; 0.2%). New signings then stepped 4 times between 2017 and 2020, each step concentrated in a single month and a handful of parent blocks. An OS release precedes every step -- a different one each time -- while 31% of all months follow some OS release within 3 months, and two of the five RSA/SHA-256 steps have no OS release in the year before them at all.</a:t>
+            </a:r>
+          </a:p>
+          <a:p>
+            <a:pPr>
+              <a:spcAft>
+                <a:spcPts val="700"/>
+              </a:spcAft>
+            </a:pPr>
+            <a:r>
+              <a:rPr sz="1150" b="0">
+                <a:solidFill>
+                  <a:srgbClr val="0B0B0B"/>
+                </a:solidFill>
+                <a:latin typeface="Segoe UI"/>
+              </a:rPr>
+              <a:t>An update can only change what a zone signed after it gets, never an existing zone, so this is where a default would act. That the steps exist is evidence operators moved in batches once the defaults existed upstream; which delivery path reached any of them is not identifiable from published records.</a:t>
             </a:r>
           </a:p>
           <a:p>
@@ -13257,7 +13422,7 @@
                 </a:solidFill>
                 <a:latin typeface="Segoe UI"/>
               </a:rPr>
-              <a:t>OS packages: Ubuntu LTS 16.04 to 24.04 and Debian 9 to 13, from Launchpad and sources.debian.org. Package dates bound when a default became reachable by apt, not when any operator upgraded; the Debian 9 step is 55 blocks in one corpus, APNIC-heavy, with one block a third of it.</a:t>
+              <a:t>OS packages cover Debian 9-13 and Ubuntu LTS 16.04-24.04 by version, plus RHEL majors by date. They are one delivery path among many: RHEL base carries only BIND (Knot and PowerDNS need EPEL) and had no ECDSA-default signer until RHEL 9 in 2022-05, and FreeBSD ports, Alpine, containers and source builds are not represented at all. Package dates bound when a default became reachable, not what anyone ran.</a:t>
             </a:r>
           </a:p>
           <a:p>
@@ -15400,7 +15565,7 @@
                 </a:solidFill>
                 <a:latin typeface="Segoe UI"/>
               </a:rPr>
-              <a:t>Reverse DNS tells the auto-update story directly, and the OS release is the event, not the upstream one. New signings ignored the Knot 2.1.0 and PowerDNS 4.0.0 defaults on their upstream dates (0.2% -&gt; 0.3% and 0.3% -&gt; 0.2% ECDSA in the year either side) and ignored Ubuntu 16.04, which carried only Knot's. In the year after Debian 9 (2017-06-17) shipped both PowerDNS 4.0.3 and Knot 2.4.0 with ECDSA default, the share went 0.2% -&gt; 57.1% and the blocks choosing it 3 -&gt; 55. BIND 9.16.0 (Ubuntu 20.04, Debian 11) added a second step (22.8% -&gt; 38.8%).</a:t>
+              <a:t>Reverse DNS shows operators switching in batches, not diffusing, and the trigger cannot be identified. New signings ignored the Knot 2.1.0 and PowerDNS 4.0.0 defaults on their upstream dates (0.2% -&gt; 0.3% and 0.3% -&gt; 0.2%), then stepped 4 times: 2017Q3, 2019Q1, 2019Q4, 2020Q3. The first is 157 signings of which 155 fall in one month, all but 2 in APNIC, one parent block 40% of it. Each step has a different OS release behind it and 31% of all months follow some OS release within 3 months anyway.</a:t>
             </a:r>
           </a:p>
         </p:txBody>

--- a/out/analysis/dnssec_program_rfc_cases.pptx
+++ b/out/analysis/dnssec_program_rfc_cases.pptx
@@ -13167,7 +13167,7 @@
                 </a:solidFill>
                 <a:latin typeface="Segoe UI"/>
               </a:rPr>
-              <a:t>RSA/SHA-256: the share of new reverse signings choosing it rose from 0.9% to 20.0% across OpenDNSSEC 1.2.0's default (2011-03) and kept rising for two years. Consistent with defaults arriving through updates; not attributable to one vendor, since BIND 9.7.0 had shipped the algorithm 13 months earlier.</a:t>
+              <a:t>RSA/SHA-256: new reverse signings choosing it go 0% (2010Q4) -&gt; 20% (2011Q2) -&gt; 81% (2012Q2), with the detected step at 2012Q2, 15 months after OpenDNSSEC 1.2.0's default and 27 after BIND 9.7.0. Two of its five steps have no OS release in the year before them at all.</a:t>
             </a:r>
           </a:p>
           <a:p>
@@ -18924,7 +18924,7 @@
                 </a:solidFill>
                 <a:latin typeface="Segoe UI"/>
               </a:rPr>
-              <a:t>Reverse DNS does witness it. In the twelve months after OpenDNSSEC 1.2.0 made RSASHA256 its default (2011-03), the share of newly signed delegations choosing it went from 0.9% to 20.0% (on 212 and 459 signings). That is the one default change in this study followed by a step in what new zones chose -- but BIND 9.7.0 had enabled the algorithm 13 months earlier, and the rise continued for two years, so it reads as the algorithm becoming available everywhere, not as one vendor's default.</a:t>
+              <a:t>Reverse DNS does witness it, and shows the same batching as ECDSA. New signings choosing RSASHA256 go from 0% in 2010Q4 to 20% in 2011Q2 and 81% in 2012Q2, and the step detector puts the step at 2012Q2 -- 15 months after OpenDNSSEC 1.2.0 made RSASHA256 its default and 27 after BIND 9.7.0 shipped it. The 2011 rise is 88 signings across three RIRs with one parent block a third of them, so it is a few operators, not a population.</a:t>
             </a:r>
           </a:p>
           <a:p>

--- a/out/analysis/dnssec_program_rfc_cases.pptx
+++ b/out/analysis/dnssec_program_rfc_cases.pptx
@@ -15533,7 +15533,7 @@
                 </a:solidFill>
                 <a:latin typeface="Segoe UI"/>
               </a:rPr>
-              <a:t>The moves that made ECDSA the majority came much later and were all rollovers: .se 2019-01 +119,500 (30 months after that default) and .se 2019-06 +217,437. The largest of all, .ch 2021-06..2021-11 +591,333, was a signing wave in which the new zones chose ECDSA 96% of the time: by 2021 every signer default had been ECDSA for five years.</a:t>
+              <a:t>In .se the moves that took ECDSA to the majority came much later and were entirely rollovers: 2019-01 +119,500 (30 months after that default) and .se 2019-06 +217,437. The largest of all, .ch 2021-06..2021-11 +591,333, was a signing wave in which the new zones chose ECDSA 99% of the time (that is the flow share of the zones that became signed, not the stock share of ECDSA among all signed .ch zones, which ended at 96%). By 2021 every signer default had been ECDSA for five years. .nu instead crossed 50% on new signings in 2022-01, and .ch and .li were already past it on entry.</a:t>
             </a:r>
           </a:p>
           <a:p>

--- a/out/analysis/dnssec_program_rfc_cases.pptx
+++ b/out/analysis/dnssec_program_rfc_cases.pptx
@@ -10454,7 +10454,7 @@
                 </a:solidFill>
                 <a:latin typeface="Segoe UI"/>
               </a:rPr>
-              <a:t>97% of months contain some DNS release, so 'a release came shortly before' is always true. Each lag is compared with the same lag at every month of the series: the chance rate. A spike is release-timed only if it beats that.</a:t>
+              <a:t>95% of months contain some DNS release, so 'a release came shortly before' is always true. Each lag is compared with the same lag at every month of the series: the chance rate. A spike is release-timed only if it beats that.</a:t>
             </a:r>
           </a:p>
         </p:txBody>
@@ -13008,7 +13008,7 @@
                 </a:solidFill>
                 <a:latin typeface="Segoe UI"/>
               </a:rPr>
-              <a:t>CVEs did not lead any push. Every CVE nearest to a spike is a validator bug (memory leak, assertion failure); the one CVE that sits inside a causal chain, CVE-2021-40083, is a symptom of the same iteration problem the caps fixed. Median lag from a spike to the nearest CVE: 16 months for ECDSA, 57 for NSEC3.</a:t>
+              <a:t>CVEs did not lead any push. Every CVE nearest to a spike is a validator bug (memory leak, assertion failure); the one CVE that sits inside a causal chain, CVE-2021-40083, is a symptom of the same iteration problem the caps fixed. Median lag from a spike to the nearest CVE: 16.5 months for ECDSA, 57 for NSEC3. Most are resolver bugs, but CVE-2014-0591, nearest to 16 of the NSEC3 spikes, is an assertion failure in BIND's authoritative NSEC3 code.</a:t>
             </a:r>
           </a:p>
         </p:txBody>

--- a/out/analysis/dnssec_program_rfc_cases.pptx
+++ b/out/analysis/dnssec_program_rfc_cases.pptx
@@ -10068,7 +10068,7 @@
                 </a:solidFill>
                 <a:latin typeface="Segoe UI"/>
               </a:rPr>
-              <a:t>PowerDNS Auth: caps it from 4.5.0, 2021-07 (13 mo before the RFC); CVE-2023-50868 2024-02.</a:t>
+              <a:t>PowerDNS Auth: caps it from 4.5.0, 2021-07 (13 mo before the RFC).</a:t>
             </a:r>
           </a:p>
           <a:p>

--- a/out/analysis/dnssec_program_rfc_cases.pptx
+++ b/out/analysis/dnssec_program_rfc_cases.pptx
@@ -8725,7 +8725,7 @@
                             <a:srgbClr val="0B0B0B"/>
                           </a:solidFill>
                         </a:rPr>
-                        <a:t>2017-05..2017-06</a:t>
+                        <a:t>2017-06..2017-07</a:t>
                       </a:r>
                     </a:p>
                   </a:txBody>
@@ -8788,49 +8788,49 @@
                             <a:srgbClr val="0B0B0B"/>
                           </a:solidFill>
                         </a:rPr>
-                        <a:t>BIND 9 9.7.0 (87 mo before)</a:t>
-                      </a:r>
-                    </a:p>
-                  </a:txBody>
-                  <a:tcPr marL="45720" marR="45720" marT="27432" marB="27432">
-                    <a:solidFill>
-                      <a:srgbClr val="FCFCFB"/>
-                    </a:solidFill>
-                  </a:tcPr>
-                </a:tc>
-                <a:tc>
-                  <a:txBody>
-                    <a:bodyPr/>
-                    <a:lstStyle/>
-                    <a:p>
-                      <a:r>
-                        <a:rPr sz="850" b="0">
-                          <a:solidFill>
-                            <a:srgbClr val="0B0B0B"/>
-                          </a:solidFill>
-                        </a:rPr>
-                        <a:t>BIND 9 9.7.0 (87 mo before)</a:t>
-                      </a:r>
-                    </a:p>
-                  </a:txBody>
-                  <a:tcPr marL="45720" marR="45720" marT="27432" marB="27432">
-                    <a:solidFill>
-                      <a:srgbClr val="FCFCFB"/>
-                    </a:solidFill>
-                  </a:tcPr>
-                </a:tc>
-                <a:tc>
-                  <a:txBody>
-                    <a:bodyPr/>
-                    <a:lstStyle/>
-                    <a:p>
-                      <a:r>
-                        <a:rPr sz="850" b="0">
-                          <a:solidFill>
-                            <a:srgbClr val="0B0B0B"/>
-                          </a:solidFill>
-                        </a:rPr>
-                        <a:t>CVE-2014-0591 (BIND 9) (40 mo before)</a:t>
+                        <a:t>BIND 9 9.7.0 (88 mo before)</a:t>
+                      </a:r>
+                    </a:p>
+                  </a:txBody>
+                  <a:tcPr marL="45720" marR="45720" marT="27432" marB="27432">
+                    <a:solidFill>
+                      <a:srgbClr val="FCFCFB"/>
+                    </a:solidFill>
+                  </a:tcPr>
+                </a:tc>
+                <a:tc>
+                  <a:txBody>
+                    <a:bodyPr/>
+                    <a:lstStyle/>
+                    <a:p>
+                      <a:r>
+                        <a:rPr sz="850" b="0">
+                          <a:solidFill>
+                            <a:srgbClr val="0B0B0B"/>
+                          </a:solidFill>
+                        </a:rPr>
+                        <a:t>BIND 9 9.7.0 (88 mo before)</a:t>
+                      </a:r>
+                    </a:p>
+                  </a:txBody>
+                  <a:tcPr marL="45720" marR="45720" marT="27432" marB="27432">
+                    <a:solidFill>
+                      <a:srgbClr val="FCFCFB"/>
+                    </a:solidFill>
+                  </a:tcPr>
+                </a:tc>
+                <a:tc>
+                  <a:txBody>
+                    <a:bodyPr/>
+                    <a:lstStyle/>
+                    <a:p>
+                      <a:r>
+                        <a:rPr sz="850" b="0">
+                          <a:solidFill>
+                            <a:srgbClr val="0B0B0B"/>
+                          </a:solidFill>
+                        </a:rPr>
+                        <a:t>CVE-2014-0591 (BIND 9) (41 mo before)</a:t>
                       </a:r>
                     </a:p>
                   </a:txBody>
@@ -8879,7 +8879,7 @@
                 </a:solidFill>
                 <a:latin typeface="Segoe UI"/>
               </a:rPr>
-              <a:t>BIND 9.6.0 signed NSEC3 9 months after the RFC and Unbound validated it from 0.7.1, before it. The first NSEC3-signed reverse delegations (RIPE) appear 2009-07, 7 months after BIND 9.6.0; the first CVE on the mechanism came 2009-10, 3 months after that. Code, then deployment, then CVEs, each within a year.</a:t>
+              <a:t>BIND 9.6.0 signed NSEC3 9 months after the RFC and Unbound validated it from 0.7.1, before it. The first NSEC3-signed reverse delegations (RIPE) appear 2009-08, 8 months after BIND 9.6.0; the first CVE on the mechanism came 2009-10, 2 months after that. Code, then deployment, then CVEs, each within a year.</a:t>
             </a:r>
           </a:p>
           <a:p>
@@ -8911,7 +8911,7 @@
                 </a:solidFill>
                 <a:latin typeface="Segoe UI"/>
               </a:rPr>
-              <a:t>Reverse DNS sees NSEC3 only through algorithm 7 (RSASHA1-NSEC3-SHA1), a proxy that misses NSEC3 with 8 or 13. Its largest spike, ARIN 2017-05 +167, is 87 months after the nearest signer release. Overall 0 of 17 spikes are within 3 months of a signer release.</a:t>
+              <a:t>Reverse DNS sees NSEC3 only through algorithm 7 (RSASHA1-NSEC3-SHA1), a proxy that misses NSEC3 with 8 or 13. Its largest spike, ARIN 2017-06 +167, is 88 months after the nearest signer release. Overall 0 of 17 spikes are within 3 months of a signer release.</a:t>
             </a:r>
           </a:p>
         </p:txBody>
@@ -12396,7 +12396,7 @@
                             <a:srgbClr val="0B0B0B"/>
                           </a:solidFill>
                         </a:rPr>
-                        <a:t>default 0%/4%; cap n/a; CVE n/a/n/a</a:t>
+                        <a:t>default 0%/3%; cap n/a; CVE n/a/n/a</a:t>
                       </a:r>
                     </a:p>
                   </a:txBody>
@@ -13008,7 +13008,7 @@
                 </a:solidFill>
                 <a:latin typeface="Segoe UI"/>
               </a:rPr>
-              <a:t>CVEs did not lead any push. Every CVE nearest to a spike is a validator bug (memory leak, assertion failure); the one CVE that sits inside a causal chain, CVE-2021-40083, is a symptom of the same iteration problem the caps fixed. Median lag from a spike to the nearest CVE: 16.5 months for ECDSA, 57 for NSEC3. Most are resolver bugs, but CVE-2014-0591, nearest to 16 of the NSEC3 spikes, is an assertion failure in BIND's authoritative NSEC3 code.</a:t>
+              <a:t>CVEs did not lead any push. Every CVE nearest to a spike is a validator bug (memory leak, assertion failure); the one CVE that sits inside a causal chain, CVE-2021-40083, is a symptom of the same iteration problem the caps fixed. Median lag from a spike to the nearest CVE: 17.0 months for ECDSA, 58 for NSEC3. Most are resolver bugs, but CVE-2014-0591, nearest to 16 of the NSEC3 spikes, is an assertion failure in BIND's authoritative NSEC3 code.</a:t>
             </a:r>
           </a:p>
         </p:txBody>
@@ -18244,7 +18244,7 @@
                             <a:srgbClr val="0B0B0B"/>
                           </a:solidFill>
                         </a:rPr>
-                        <a:t>2016-11..2016-12</a:t>
+                        <a:t>2016-12..2017-01</a:t>
                       </a:r>
                     </a:p>
                   </a:txBody>
@@ -18307,28 +18307,28 @@
                             <a:srgbClr val="0B0B0B"/>
                           </a:solidFill>
                         </a:rPr>
-                        <a:t>Knot DNS 2.0.0 (17 mo before)</a:t>
-                      </a:r>
-                    </a:p>
-                  </a:txBody>
-                  <a:tcPr marL="45720" marR="45720" marT="27432" marB="27432">
-                    <a:solidFill>
-                      <a:srgbClr val="FCFCFB"/>
-                    </a:solidFill>
-                  </a:tcPr>
-                </a:tc>
-                <a:tc>
-                  <a:txBody>
-                    <a:bodyPr/>
-                    <a:lstStyle/>
-                    <a:p>
-                      <a:r>
-                        <a:rPr sz="850" b="0">
-                          <a:solidFill>
-                            <a:srgbClr val="0B0B0B"/>
-                          </a:solidFill>
-                        </a:rPr>
-                        <a:t>Knot DNS 2.0.0 (17 mo before)</a:t>
+                        <a:t>Knot DNS 2.0.0 (18 mo before)</a:t>
+                      </a:r>
+                    </a:p>
+                  </a:txBody>
+                  <a:tcPr marL="45720" marR="45720" marT="27432" marB="27432">
+                    <a:solidFill>
+                      <a:srgbClr val="FCFCFB"/>
+                    </a:solidFill>
+                  </a:tcPr>
+                </a:tc>
+                <a:tc>
+                  <a:txBody>
+                    <a:bodyPr/>
+                    <a:lstStyle/>
+                    <a:p>
+                      <a:r>
+                        <a:rPr sz="850" b="0">
+                          <a:solidFill>
+                            <a:srgbClr val="0B0B0B"/>
+                          </a:solidFill>
+                        </a:rPr>
+                        <a:t>Knot DNS 2.0.0 (18 mo before)</a:t>
                       </a:r>
                     </a:p>
                   </a:txBody>
@@ -18414,7 +18414,7 @@
                             <a:srgbClr val="0B0B0B"/>
                           </a:solidFill>
                         </a:rPr>
-                        <a:t>2019-05..2019-06</a:t>
+                        <a:t>2019-06..2019-07</a:t>
                       </a:r>
                     </a:p>
                   </a:txBody>
@@ -18477,28 +18477,28 @@
                             <a:srgbClr val="0B0B0B"/>
                           </a:solidFill>
                         </a:rPr>
-                        <a:t>Knot DNS 2.0.0 (47 mo before)</a:t>
-                      </a:r>
-                    </a:p>
-                  </a:txBody>
-                  <a:tcPr marL="45720" marR="45720" marT="27432" marB="27432">
-                    <a:solidFill>
-                      <a:srgbClr val="FCFCFB"/>
-                    </a:solidFill>
-                  </a:tcPr>
-                </a:tc>
-                <a:tc>
-                  <a:txBody>
-                    <a:bodyPr/>
-                    <a:lstStyle/>
-                    <a:p>
-                      <a:r>
-                        <a:rPr sz="850" b="0">
-                          <a:solidFill>
-                            <a:srgbClr val="0B0B0B"/>
-                          </a:solidFill>
-                        </a:rPr>
-                        <a:t>Knot DNS 2.0.0 (47 mo before)</a:t>
+                        <a:t>Knot DNS 2.0.0 (48 mo before)</a:t>
+                      </a:r>
+                    </a:p>
+                  </a:txBody>
+                  <a:tcPr marL="45720" marR="45720" marT="27432" marB="27432">
+                    <a:solidFill>
+                      <a:srgbClr val="FCFCFB"/>
+                    </a:solidFill>
+                  </a:tcPr>
+                </a:tc>
+                <a:tc>
+                  <a:txBody>
+                    <a:bodyPr/>
+                    <a:lstStyle/>
+                    <a:p>
+                      <a:r>
+                        <a:rPr sz="850" b="0">
+                          <a:solidFill>
+                            <a:srgbClr val="0B0B0B"/>
+                          </a:solidFill>
+                        </a:rPr>
+                        <a:t>Knot DNS 2.0.0 (48 mo before)</a:t>
                       </a:r>
                     </a:p>
                   </a:txBody>
@@ -18584,7 +18584,7 @@
                             <a:srgbClr val="0B0B0B"/>
                           </a:solidFill>
                         </a:rPr>
-                        <a:t>2019-12</a:t>
+                        <a:t>2020-01</a:t>
                       </a:r>
                     </a:p>
                   </a:txBody>
@@ -18647,28 +18647,28 @@
                             <a:srgbClr val="0B0B0B"/>
                           </a:solidFill>
                         </a:rPr>
-                        <a:t>Knot DNS 2.0.0 (54 mo before)</a:t>
-                      </a:r>
-                    </a:p>
-                  </a:txBody>
-                  <a:tcPr marL="45720" marR="45720" marT="27432" marB="27432">
-                    <a:solidFill>
-                      <a:srgbClr val="FCFCFB"/>
-                    </a:solidFill>
-                  </a:tcPr>
-                </a:tc>
-                <a:tc>
-                  <a:txBody>
-                    <a:bodyPr/>
-                    <a:lstStyle/>
-                    <a:p>
-                      <a:r>
-                        <a:rPr sz="850" b="0">
-                          <a:solidFill>
-                            <a:srgbClr val="0B0B0B"/>
-                          </a:solidFill>
-                        </a:rPr>
-                        <a:t>Knot DNS 2.0.0 (54 mo before)</a:t>
+                        <a:t>Knot DNS 2.0.0 (55 mo before)</a:t>
+                      </a:r>
+                    </a:p>
+                  </a:txBody>
+                  <a:tcPr marL="45720" marR="45720" marT="27432" marB="27432">
+                    <a:solidFill>
+                      <a:srgbClr val="FCFCFB"/>
+                    </a:solidFill>
+                  </a:tcPr>
+                </a:tc>
+                <a:tc>
+                  <a:txBody>
+                    <a:bodyPr/>
+                    <a:lstStyle/>
+                    <a:p>
+                      <a:r>
+                        <a:rPr sz="850" b="0">
+                          <a:solidFill>
+                            <a:srgbClr val="0B0B0B"/>
+                          </a:solidFill>
+                        </a:rPr>
+                        <a:t>Knot DNS 2.0.0 (55 mo before)</a:t>
                       </a:r>
                     </a:p>
                   </a:txBody>
@@ -18754,7 +18754,7 @@
                             <a:srgbClr val="0B0B0B"/>
                           </a:solidFill>
                         </a:rPr>
-                        <a:t>2015-11</a:t>
+                        <a:t>2015-12</a:t>
                       </a:r>
                     </a:p>
                   </a:txBody>
@@ -18817,28 +18817,28 @@
                             <a:srgbClr val="0B0B0B"/>
                           </a:solidFill>
                         </a:rPr>
-                        <a:t>Knot DNS 2.0.0 (5 mo before)</a:t>
-                      </a:r>
-                    </a:p>
-                  </a:txBody>
-                  <a:tcPr marL="45720" marR="45720" marT="27432" marB="27432">
-                    <a:solidFill>
-                      <a:srgbClr val="FCFCFB"/>
-                    </a:solidFill>
-                  </a:tcPr>
-                </a:tc>
-                <a:tc>
-                  <a:txBody>
-                    <a:bodyPr/>
-                    <a:lstStyle/>
-                    <a:p>
-                      <a:r>
-                        <a:rPr sz="850" b="0">
-                          <a:solidFill>
-                            <a:srgbClr val="0B0B0B"/>
-                          </a:solidFill>
-                        </a:rPr>
-                        <a:t>Knot DNS 2.0.0 (5 mo before)</a:t>
+                        <a:t>Knot DNS 2.0.0 (6 mo before)</a:t>
+                      </a:r>
+                    </a:p>
+                  </a:txBody>
+                  <a:tcPr marL="45720" marR="45720" marT="27432" marB="27432">
+                    <a:solidFill>
+                      <a:srgbClr val="FCFCFB"/>
+                    </a:solidFill>
+                  </a:tcPr>
+                </a:tc>
+                <a:tc>
+                  <a:txBody>
+                    <a:bodyPr/>
+                    <a:lstStyle/>
+                    <a:p>
+                      <a:r>
+                        <a:rPr sz="850" b="0">
+                          <a:solidFill>
+                            <a:srgbClr val="0B0B0B"/>
+                          </a:solidFill>
+                        </a:rPr>
+                        <a:t>Knot DNS 2.0.0 (6 mo before)</a:t>
                       </a:r>
                     </a:p>
                   </a:txBody>
@@ -18940,7 +18940,7 @@
                 </a:solidFill>
                 <a:latin typeface="Segoe UI"/>
               </a:rPr>
-              <a:t>Spikes vs releases: 1 of 24 spikes fall within 3 months of a default change (expected by chance about 0.7); the median lag from a spike to the nearest signer release is 38 months. No CVE names this algorithm.</a:t>
+              <a:t>Spikes vs releases: 1 of 24 spikes fall within 3 months of a default change (expected by chance about 0.6); the median lag from a spike to the nearest signer release is 40 months. No CVE names this algorithm.</a:t>
             </a:r>
           </a:p>
         </p:txBody>
@@ -18979,7 +18979,7 @@
                 </a:solidFill>
                 <a:latin typeface="Segoe UI"/>
               </a:rPr>
-              <a:t>24 spikes (4 OpenINTEL, 20 reverse). Within 3 months after: signer release 1, default change 1, validator cap 0, CVE 0, any DNS release 24. Chance that a random month is within 3 months after a default change: forward 0%, reverse 4%. Full ledger: out/analysis/dns_program_rfc_spikes.csv</a:t>
+              <a:t>24 spikes (4 OpenINTEL, 20 reverse). Within 3 months after: signer release 1, default change 1, validator cap 0, CVE 0, any DNS release 24. Chance that a random month is within 3 months after a default change: forward 0%, reverse 3%. Full ledger: out/analysis/dns_program_rfc_spikes.csv</a:t>
             </a:r>
           </a:p>
         </p:txBody>
